--- a/website/public/beispiele/strategie.pptx
+++ b/website/public/beispiele/strategie.pptx
@@ -134,26 +134,26 @@
   <p:extLst>
     <p:ext uri="{521415D9-36F7-43E2-AB2F-B90AF26B5E84}">
       <p14:sectionLst xmlns:p14="http://schemas.microsoft.com/office/powerpoint/2010/main">
-        <p14:section name="Einstieg" id="{96D40F23-8530-4FAA-9AD7-51B443C57889}">
+        <p14:section name="Einstieg" id="{79A98B86-6827-42AA-BFAC-92B574BC1DB4}">
           <p14:sldIdLst>
             <p14:sldId id="256"/>
             <p14:sldId id="257"/>
           </p14:sldIdLst>
         </p14:section>
-        <p14:section name="01 Ausgangslage" id="{48DEB6AB-91F2-4558-AF5D-C8D31B00203C}">
+        <p14:section name="01 Ausgangslage" id="{1C78D6B7-9AA6-4DDD-8B73-9AD19931BE42}">
           <p14:sldIdLst>
             <p14:sldId id="258"/>
             <p14:sldId id="259"/>
             <p14:sldId id="260"/>
           </p14:sldIdLst>
         </p14:section>
-        <p14:section name="02 Drei Schwerpunkte" id="{2A568D7C-286D-4537-B272-C5C407CAA68D}">
+        <p14:section name="02 Drei Schwerpunkte" id="{03A40927-C6CE-43F2-BF6B-61B8DD668214}">
           <p14:sldIdLst>
             <p14:sldId id="261"/>
             <p14:sldId id="262"/>
           </p14:sldIdLst>
         </p14:section>
-        <p14:section name="03 Weg bis 2027" id="{F5EBC1A3-7AE4-4664-9412-0D36BD69C874}">
+        <p14:section name="03 Weg bis 2027" id="{6DFA560F-3983-4117-9E9F-A2364EDF6E3E}">
           <p14:sldIdLst>
             <p14:sldId id="263"/>
             <p14:sldId id="264"/>

--- a/website/public/beispiele/strategie.pptx
+++ b/website/public/beispiele/strategie.pptx
@@ -134,26 +134,26 @@
   <p:extLst>
     <p:ext uri="{521415D9-36F7-43E2-AB2F-B90AF26B5E84}">
       <p14:sectionLst xmlns:p14="http://schemas.microsoft.com/office/powerpoint/2010/main">
-        <p14:section name="Einstieg" id="{79A98B86-6827-42AA-BFAC-92B574BC1DB4}">
+        <p14:section name="Einstieg" id="{35E01C99-39B7-4553-9C65-ED172C73A229}">
           <p14:sldIdLst>
             <p14:sldId id="256"/>
             <p14:sldId id="257"/>
           </p14:sldIdLst>
         </p14:section>
-        <p14:section name="01 Ausgangslage" id="{1C78D6B7-9AA6-4DDD-8B73-9AD19931BE42}">
+        <p14:section name="01 Ausgangslage" id="{A723AC06-BEFD-47A1-93DA-72B796B9C279}">
           <p14:sldIdLst>
             <p14:sldId id="258"/>
             <p14:sldId id="259"/>
             <p14:sldId id="260"/>
           </p14:sldIdLst>
         </p14:section>
-        <p14:section name="02 Drei Schwerpunkte" id="{03A40927-C6CE-43F2-BF6B-61B8DD668214}">
+        <p14:section name="02 Drei Schwerpunkte" id="{C3E44D79-A4B8-4987-AF70-0C949654639C}">
           <p14:sldIdLst>
             <p14:sldId id="261"/>
             <p14:sldId id="262"/>
           </p14:sldIdLst>
         </p14:section>
-        <p14:section name="03 Weg bis 2027" id="{6DFA560F-3983-4117-9E9F-A2364EDF6E3E}">
+        <p14:section name="03 Weg bis 2027" id="{339513E2-8E8C-458F-9DF2-6B65D1192B42}">
           <p14:sldIdLst>
             <p14:sldId id="263"/>
             <p14:sldId id="264"/>
@@ -457,7 +457,7 @@
         <a:lstStyle/>
         <a:p>
           <a:pPr>
-            <a:defRPr sz="1100">
+            <a:defRPr sz="1400">
               <a:solidFill>
                 <a:srgbClr val="1A1D24"/>
               </a:solidFill>
@@ -2607,23 +2607,16 @@
         </p:nvSpPr>
         <p:spPr>
           <a:xfrm>
-            <a:off x="685800" y="2358628"/>
-            <a:ext cx="152400" cy="152400"/>
+            <a:off x="685800" y="2415778"/>
+            <a:ext cx="228600" cy="38100"/>
           </a:xfrm>
-          <a:prstGeom prst="ellipse">
-            <a:avLst>
-              <a:gd name="adj" fmla="val 50000"/>
-            </a:avLst>
+          <a:prstGeom prst="rect">
+            <a:avLst/>
           </a:prstGeom>
           <a:solidFill>
             <a:srgbClr val="1F3A8A"/>
           </a:solidFill>
-          <a:ln w="28575">
-            <a:solidFill>
-              <a:srgbClr val="FBFAF7"/>
-            </a:solidFill>
-            <a:prstDash val="solid"/>
-          </a:ln>
+          <a:ln/>
         </p:spPr>
       </p:sp>
       <p:sp>
@@ -2635,7 +2628,7 @@
         <p:spPr>
           <a:xfrm>
             <a:off x="685800" y="2720578"/>
-            <a:ext cx="2505075" cy="1754014"/>
+            <a:ext cx="2505075" cy="1923752"/>
           </a:xfrm>
           <a:prstGeom prst="rect">
             <a:avLst/>
@@ -2652,7 +2645,7 @@
         <p:spPr>
           <a:xfrm>
             <a:off x="685800" y="2720578"/>
-            <a:ext cx="2426637" cy="238869"/>
+            <a:ext cx="2426637" cy="408608"/>
           </a:xfrm>
           <a:prstGeom prst="rect">
             <a:avLst/>
@@ -2666,22 +2659,22 @@
           <a:p>
             <a:pPr algn="l" indent="0" marL="0">
               <a:lnSpc>
-                <a:spcPts val="1881"/>
+                <a:spcPts val="3217"/>
               </a:lnSpc>
               <a:buNone/>
             </a:pPr>
             <a:r>
-              <a:rPr lang="de-DE" altLang="en-US" sz="1425" b="1" dirty="0">
+              <a:rPr lang="de-DE" altLang="en-US" sz="2925" spc="-18" kern="0" dirty="0">
                 <a:solidFill>
                   <a:srgbClr val="1F3A8A"/>
                 </a:solidFill>
-                <a:latin typeface="Source Sans 3" pitchFamily="34" charset="0"/>
-                <a:ea typeface="Source Sans 3" pitchFamily="34" charset="-122"/>
-                <a:cs typeface="Source Sans 3" pitchFamily="34" charset="-120"/>
+                <a:latin typeface="Source Serif 4" pitchFamily="34" charset="0"/>
+                <a:ea typeface="Source Serif 4" pitchFamily="34" charset="-122"/>
+                <a:cs typeface="Source Serif 4" pitchFamily="34" charset="-120"/>
               </a:rPr>
               <a:t>Q4 2026</a:t>
             </a:r>
-            <a:endParaRPr lang="de-DE" sz="1425" dirty="0"/>
+            <a:endParaRPr lang="de-DE" sz="2925" dirty="0"/>
           </a:p>
         </p:txBody>
       </p:sp>
@@ -2693,7 +2686,7 @@
         </p:nvSpPr>
         <p:spPr>
           <a:xfrm>
-            <a:off x="685800" y="3073747"/>
+            <a:off x="685800" y="3243486"/>
             <a:ext cx="2426637" cy="302121"/>
           </a:xfrm>
           <a:prstGeom prst="rect">
@@ -2735,7 +2728,7 @@
         </p:nvSpPr>
         <p:spPr>
           <a:xfrm>
-            <a:off x="685800" y="3490168"/>
+            <a:off x="685800" y="3659907"/>
             <a:ext cx="2426637" cy="946324"/>
           </a:xfrm>
           <a:prstGeom prst="rect">
@@ -2777,23 +2770,16 @@
         </p:nvSpPr>
         <p:spPr>
           <a:xfrm>
-            <a:off x="3457575" y="2358628"/>
-            <a:ext cx="152400" cy="152400"/>
+            <a:off x="3457575" y="2415778"/>
+            <a:ext cx="228600" cy="38100"/>
           </a:xfrm>
-          <a:prstGeom prst="ellipse">
-            <a:avLst>
-              <a:gd name="adj" fmla="val 50000"/>
-            </a:avLst>
+          <a:prstGeom prst="rect">
+            <a:avLst/>
           </a:prstGeom>
           <a:solidFill>
             <a:srgbClr val="1F3A8A"/>
           </a:solidFill>
-          <a:ln w="28575">
-            <a:solidFill>
-              <a:srgbClr val="FBFAF7"/>
-            </a:solidFill>
-            <a:prstDash val="solid"/>
-          </a:ln>
+          <a:ln/>
         </p:spPr>
       </p:sp>
       <p:sp>
@@ -2805,7 +2791,7 @@
         <p:spPr>
           <a:xfrm>
             <a:off x="3457575" y="2720578"/>
-            <a:ext cx="2505075" cy="1754014"/>
+            <a:ext cx="2505075" cy="1923752"/>
           </a:xfrm>
           <a:prstGeom prst="rect">
             <a:avLst/>
@@ -2822,7 +2808,7 @@
         <p:spPr>
           <a:xfrm>
             <a:off x="3457575" y="2720578"/>
-            <a:ext cx="2426637" cy="238869"/>
+            <a:ext cx="2426637" cy="408608"/>
           </a:xfrm>
           <a:prstGeom prst="rect">
             <a:avLst/>
@@ -2836,22 +2822,22 @@
           <a:p>
             <a:pPr algn="l" indent="0" marL="0">
               <a:lnSpc>
-                <a:spcPts val="1881"/>
+                <a:spcPts val="3217"/>
               </a:lnSpc>
               <a:buNone/>
             </a:pPr>
             <a:r>
-              <a:rPr lang="de-DE" altLang="en-US" sz="1425" b="1" dirty="0">
+              <a:rPr lang="de-DE" altLang="en-US" sz="2925" spc="-18" kern="0" dirty="0">
                 <a:solidFill>
                   <a:srgbClr val="1F3A8A"/>
                 </a:solidFill>
-                <a:latin typeface="Source Sans 3" pitchFamily="34" charset="0"/>
-                <a:ea typeface="Source Sans 3" pitchFamily="34" charset="-122"/>
-                <a:cs typeface="Source Sans 3" pitchFamily="34" charset="-120"/>
+                <a:latin typeface="Source Serif 4" pitchFamily="34" charset="0"/>
+                <a:ea typeface="Source Serif 4" pitchFamily="34" charset="-122"/>
+                <a:cs typeface="Source Serif 4" pitchFamily="34" charset="-120"/>
               </a:rPr>
               <a:t>Q1 2027</a:t>
             </a:r>
-            <a:endParaRPr lang="de-DE" sz="1425" dirty="0"/>
+            <a:endParaRPr lang="de-DE" sz="2925" dirty="0"/>
           </a:p>
         </p:txBody>
       </p:sp>
@@ -2863,7 +2849,7 @@
         </p:nvSpPr>
         <p:spPr>
           <a:xfrm>
-            <a:off x="3457575" y="3073747"/>
+            <a:off x="3457575" y="3243486"/>
             <a:ext cx="2426637" cy="302121"/>
           </a:xfrm>
           <a:prstGeom prst="rect">
@@ -2905,7 +2891,7 @@
         </p:nvSpPr>
         <p:spPr>
           <a:xfrm>
-            <a:off x="3457575" y="3490168"/>
+            <a:off x="3457575" y="3659907"/>
             <a:ext cx="2426637" cy="946324"/>
           </a:xfrm>
           <a:prstGeom prst="rect">
@@ -2947,23 +2933,16 @@
         </p:nvSpPr>
         <p:spPr>
           <a:xfrm>
-            <a:off x="6229350" y="2358628"/>
-            <a:ext cx="152400" cy="152400"/>
+            <a:off x="6229350" y="2415778"/>
+            <a:ext cx="228600" cy="38100"/>
           </a:xfrm>
-          <a:prstGeom prst="ellipse">
-            <a:avLst>
-              <a:gd name="adj" fmla="val 50000"/>
-            </a:avLst>
+          <a:prstGeom prst="rect">
+            <a:avLst/>
           </a:prstGeom>
           <a:solidFill>
             <a:srgbClr val="1F3A8A"/>
           </a:solidFill>
-          <a:ln w="28575">
-            <a:solidFill>
-              <a:srgbClr val="FBFAF7"/>
-            </a:solidFill>
-            <a:prstDash val="solid"/>
-          </a:ln>
+          <a:ln/>
         </p:spPr>
       </p:sp>
       <p:sp>
@@ -2975,7 +2954,7 @@
         <p:spPr>
           <a:xfrm>
             <a:off x="6229350" y="2720578"/>
-            <a:ext cx="2505075" cy="1754014"/>
+            <a:ext cx="2505075" cy="1923752"/>
           </a:xfrm>
           <a:prstGeom prst="rect">
             <a:avLst/>
@@ -2992,7 +2971,7 @@
         <p:spPr>
           <a:xfrm>
             <a:off x="6229350" y="2720578"/>
-            <a:ext cx="2426637" cy="238869"/>
+            <a:ext cx="2426637" cy="408608"/>
           </a:xfrm>
           <a:prstGeom prst="rect">
             <a:avLst/>
@@ -3006,22 +2985,22 @@
           <a:p>
             <a:pPr algn="l" indent="0" marL="0">
               <a:lnSpc>
-                <a:spcPts val="1881"/>
+                <a:spcPts val="3217"/>
               </a:lnSpc>
               <a:buNone/>
             </a:pPr>
             <a:r>
-              <a:rPr lang="de-DE" altLang="en-US" sz="1425" b="1" dirty="0">
+              <a:rPr lang="de-DE" altLang="en-US" sz="2925" spc="-18" kern="0" dirty="0">
                 <a:solidFill>
                   <a:srgbClr val="1F3A8A"/>
                 </a:solidFill>
-                <a:latin typeface="Source Sans 3" pitchFamily="34" charset="0"/>
-                <a:ea typeface="Source Sans 3" pitchFamily="34" charset="-122"/>
-                <a:cs typeface="Source Sans 3" pitchFamily="34" charset="-120"/>
+                <a:latin typeface="Source Serif 4" pitchFamily="34" charset="0"/>
+                <a:ea typeface="Source Serif 4" pitchFamily="34" charset="-122"/>
+                <a:cs typeface="Source Serif 4" pitchFamily="34" charset="-120"/>
               </a:rPr>
               <a:t>Q3 2027</a:t>
             </a:r>
-            <a:endParaRPr lang="de-DE" sz="1425" dirty="0"/>
+            <a:endParaRPr lang="de-DE" sz="2925" dirty="0"/>
           </a:p>
         </p:txBody>
       </p:sp>
@@ -3033,7 +3012,7 @@
         </p:nvSpPr>
         <p:spPr>
           <a:xfrm>
-            <a:off x="6229350" y="3073747"/>
+            <a:off x="6229350" y="3243486"/>
             <a:ext cx="2426637" cy="302121"/>
           </a:xfrm>
           <a:prstGeom prst="rect">
@@ -3075,7 +3054,7 @@
         </p:nvSpPr>
         <p:spPr>
           <a:xfrm>
-            <a:off x="6229350" y="3490168"/>
+            <a:off x="6229350" y="3659907"/>
             <a:ext cx="2426637" cy="630882"/>
           </a:xfrm>
           <a:prstGeom prst="rect">
@@ -3117,23 +3096,16 @@
         </p:nvSpPr>
         <p:spPr>
           <a:xfrm>
-            <a:off x="9001125" y="2358628"/>
-            <a:ext cx="152400" cy="152400"/>
+            <a:off x="9001125" y="2415778"/>
+            <a:ext cx="228600" cy="38100"/>
           </a:xfrm>
-          <a:prstGeom prst="ellipse">
-            <a:avLst>
-              <a:gd name="adj" fmla="val 50000"/>
-            </a:avLst>
+          <a:prstGeom prst="rect">
+            <a:avLst/>
           </a:prstGeom>
           <a:solidFill>
             <a:srgbClr val="1F3A8A"/>
           </a:solidFill>
-          <a:ln w="28575">
-            <a:solidFill>
-              <a:srgbClr val="FBFAF7"/>
-            </a:solidFill>
-            <a:prstDash val="solid"/>
-          </a:ln>
+          <a:ln/>
         </p:spPr>
       </p:sp>
       <p:sp>
@@ -3145,7 +3117,7 @@
         <p:spPr>
           <a:xfrm>
             <a:off x="9001125" y="2720578"/>
-            <a:ext cx="2505075" cy="1754014"/>
+            <a:ext cx="2505075" cy="1923752"/>
           </a:xfrm>
           <a:prstGeom prst="rect">
             <a:avLst/>
@@ -3162,7 +3134,7 @@
         <p:spPr>
           <a:xfrm>
             <a:off x="9001125" y="2720578"/>
-            <a:ext cx="2426637" cy="238869"/>
+            <a:ext cx="2426637" cy="408608"/>
           </a:xfrm>
           <a:prstGeom prst="rect">
             <a:avLst/>
@@ -3176,22 +3148,22 @@
           <a:p>
             <a:pPr algn="l" indent="0" marL="0">
               <a:lnSpc>
-                <a:spcPts val="1881"/>
+                <a:spcPts val="3217"/>
               </a:lnSpc>
               <a:buNone/>
             </a:pPr>
             <a:r>
-              <a:rPr lang="de-DE" altLang="en-US" sz="1425" b="1" dirty="0">
+              <a:rPr lang="de-DE" altLang="en-US" sz="2925" spc="-18" kern="0" dirty="0">
                 <a:solidFill>
                   <a:srgbClr val="1F3A8A"/>
                 </a:solidFill>
-                <a:latin typeface="Source Sans 3" pitchFamily="34" charset="0"/>
-                <a:ea typeface="Source Sans 3" pitchFamily="34" charset="-122"/>
-                <a:cs typeface="Source Sans 3" pitchFamily="34" charset="-120"/>
+                <a:latin typeface="Source Serif 4" pitchFamily="34" charset="0"/>
+                <a:ea typeface="Source Serif 4" pitchFamily="34" charset="-122"/>
+                <a:cs typeface="Source Serif 4" pitchFamily="34" charset="-120"/>
               </a:rPr>
               <a:t>Q4 2027</a:t>
             </a:r>
-            <a:endParaRPr lang="de-DE" sz="1425" dirty="0"/>
+            <a:endParaRPr lang="de-DE" sz="2925" dirty="0"/>
           </a:p>
         </p:txBody>
       </p:sp>
@@ -3203,7 +3175,7 @@
         </p:nvSpPr>
         <p:spPr>
           <a:xfrm>
-            <a:off x="9001125" y="3073747"/>
+            <a:off x="9001125" y="3243486"/>
             <a:ext cx="2426637" cy="302121"/>
           </a:xfrm>
           <a:prstGeom prst="rect">
@@ -3245,7 +3217,7 @@
         </p:nvSpPr>
         <p:spPr>
           <a:xfrm>
-            <a:off x="9001125" y="3490168"/>
+            <a:off x="9001125" y="3659907"/>
             <a:ext cx="2426637" cy="946324"/>
           </a:xfrm>
           <a:prstGeom prst="rect">
@@ -3288,7 +3260,7 @@
         <p:spPr>
           <a:xfrm>
             <a:off x="685800" y="6450360"/>
-            <a:ext cx="777358" cy="148530"/>
+            <a:ext cx="706661" cy="148530"/>
           </a:xfrm>
           <a:prstGeom prst="rect">
             <a:avLst/>
@@ -3315,7 +3287,7 @@
                 <a:ea typeface="Source Sans 3" pitchFamily="34" charset="-122"/>
                 <a:cs typeface="Source Sans 3" pitchFamily="34" charset="-120"/>
               </a:rPr>
-              <a:t>Strategie 2027</a:t>
+              <a:t>Weg bis 2027</a:t>
             </a:r>
             <a:endParaRPr lang="de-DE" sz="975" dirty="0"/>
           </a:p>
@@ -3329,8 +3301,8 @@
         </p:nvSpPr>
         <p:spPr>
           <a:xfrm>
-            <a:off x="11378133" y="6450360"/>
-            <a:ext cx="129988" cy="148530"/>
+            <a:off x="11149831" y="6450360"/>
+            <a:ext cx="361714" cy="148530"/>
           </a:xfrm>
           <a:prstGeom prst="rect">
             <a:avLst/>
@@ -3357,7 +3329,7 @@
                 <a:ea typeface="Source Sans 3" pitchFamily="34" charset="-122"/>
                 <a:cs typeface="Source Sans 3" pitchFamily="34" charset="-120"/>
               </a:rPr>
-              <a:t>10</a:t>
+              <a:t>10 / 12</a:t>
             </a:r>
             <a:endParaRPr lang="de-DE" sz="975" dirty="0"/>
           </a:p>
@@ -4318,16 +4290,11 @@
         <p:spPr>
           <a:xfrm>
             <a:off x="685800" y="2358628"/>
-            <a:ext cx="5276850" cy="1953295"/>
+            <a:ext cx="5276850" cy="2452539"/>
           </a:xfrm>
-          <a:prstGeom prst="roundRect">
-            <a:avLst>
-              <a:gd name="adj" fmla="val 975"/>
-            </a:avLst>
+          <a:prstGeom prst="rect">
+            <a:avLst/>
           </a:prstGeom>
-          <a:solidFill>
-            <a:srgbClr val="F3F1EC"/>
-          </a:solidFill>
           <a:ln/>
         </p:spPr>
       </p:sp>
@@ -4339,8 +4306,8 @@
         </p:nvSpPr>
         <p:spPr>
           <a:xfrm>
-            <a:off x="952500" y="2549128"/>
-            <a:ext cx="4814602" cy="302121"/>
+            <a:off x="685800" y="2701528"/>
+            <a:ext cx="5356003" cy="392683"/>
           </a:xfrm>
           <a:prstGeom prst="rect">
             <a:avLst/>
@@ -4354,12 +4321,12 @@
           <a:p>
             <a:pPr algn="l" indent="0" marL="0">
               <a:lnSpc>
-                <a:spcPts val="2379"/>
+                <a:spcPts val="3093"/>
               </a:lnSpc>
               <a:buNone/>
             </a:pPr>
             <a:r>
-              <a:rPr lang="de-DE" altLang="en-US" sz="1950" spc="-12" kern="0" dirty="0">
+              <a:rPr lang="de-DE" altLang="en-US" sz="2535" spc="-15" kern="0" dirty="0">
                 <a:solidFill>
                   <a:srgbClr val="1A1D24"/>
                 </a:solidFill>
@@ -4369,7 +4336,7 @@
               </a:rPr>
               <a:t>Zur Verabschiedung</a:t>
             </a:r>
-            <a:endParaRPr lang="de-DE" sz="1950" dirty="0"/>
+            <a:endParaRPr lang="de-DE" sz="2535" dirty="0"/>
           </a:p>
         </p:txBody>
       </p:sp>
@@ -4381,13 +4348,11 @@
         </p:nvSpPr>
         <p:spPr>
           <a:xfrm>
-            <a:off x="952500" y="3104183"/>
-            <a:ext cx="76200" cy="76200"/>
+            <a:off x="685800" y="3475583"/>
+            <a:ext cx="133350" cy="19050"/>
           </a:xfrm>
-          <a:prstGeom prst="ellipse">
-            <a:avLst>
-              <a:gd name="adj" fmla="val 50000"/>
-            </a:avLst>
+          <a:prstGeom prst="rect">
+            <a:avLst/>
           </a:prstGeom>
           <a:solidFill>
             <a:srgbClr val="1F3A8A"/>
@@ -4403,8 +4368,8 @@
         </p:nvSpPr>
         <p:spPr>
           <a:xfrm>
-            <a:off x="1162050" y="2984599"/>
-            <a:ext cx="4601909" cy="315441"/>
+            <a:off x="952500" y="3303761"/>
+            <a:ext cx="5085302" cy="362769"/>
           </a:xfrm>
           <a:prstGeom prst="rect">
             <a:avLst/>
@@ -4418,12 +4383,12 @@
           <a:p>
             <a:pPr algn="l" indent="0" marL="0">
               <a:lnSpc>
-                <a:spcPts val="2484"/>
+                <a:spcPts val="2857"/>
               </a:lnSpc>
               <a:buNone/>
             </a:pPr>
             <a:r>
-              <a:rPr lang="de-DE" altLang="en-US" sz="1800" dirty="0">
+              <a:rPr lang="de-DE" altLang="en-US" sz="2070" dirty="0">
                 <a:solidFill>
                   <a:srgbClr val="1A1D24"/>
                 </a:solidFill>
@@ -4433,7 +4398,7 @@
               </a:rPr>
               <a:t>Drei Schwerpunkte mit Zielwerten 2027</a:t>
             </a:r>
-            <a:endParaRPr lang="de-DE" sz="1800" dirty="0"/>
+            <a:endParaRPr lang="de-DE" sz="2070" dirty="0"/>
           </a:p>
         </p:txBody>
       </p:sp>
@@ -4445,13 +4410,11 @@
         </p:nvSpPr>
         <p:spPr>
           <a:xfrm>
-            <a:off x="952500" y="3514874"/>
-            <a:ext cx="76200" cy="76200"/>
+            <a:off x="685800" y="4028852"/>
+            <a:ext cx="133350" cy="19050"/>
           </a:xfrm>
-          <a:prstGeom prst="ellipse">
-            <a:avLst>
-              <a:gd name="adj" fmla="val 50000"/>
-            </a:avLst>
+          <a:prstGeom prst="rect">
+            <a:avLst/>
           </a:prstGeom>
           <a:solidFill>
             <a:srgbClr val="1F3A8A"/>
@@ -4467,8 +4430,8 @@
         </p:nvSpPr>
         <p:spPr>
           <a:xfrm>
-            <a:off x="1162050" y="3395290"/>
-            <a:ext cx="4601909" cy="315441"/>
+            <a:off x="952500" y="3857030"/>
+            <a:ext cx="5085302" cy="362769"/>
           </a:xfrm>
           <a:prstGeom prst="rect">
             <a:avLst/>
@@ -4482,12 +4445,12 @@
           <a:p>
             <a:pPr algn="l" indent="0" marL="0">
               <a:lnSpc>
-                <a:spcPts val="2484"/>
+                <a:spcPts val="2857"/>
               </a:lnSpc>
               <a:buNone/>
             </a:pPr>
             <a:r>
-              <a:rPr lang="de-DE" altLang="en-US" sz="1800" dirty="0">
+              <a:rPr lang="de-DE" altLang="en-US" sz="2070" dirty="0">
                 <a:solidFill>
                   <a:srgbClr val="1A1D24"/>
                 </a:solidFill>
@@ -4497,7 +4460,7 @@
               </a:rPr>
               <a:t>Verantwortliche aus der Bereichsleitung</a:t>
             </a:r>
-            <a:endParaRPr lang="de-DE" sz="1800" dirty="0"/>
+            <a:endParaRPr lang="de-DE" sz="2070" dirty="0"/>
           </a:p>
         </p:txBody>
       </p:sp>
@@ -4509,13 +4472,11 @@
         </p:nvSpPr>
         <p:spPr>
           <a:xfrm>
-            <a:off x="952500" y="3925565"/>
-            <a:ext cx="76200" cy="76200"/>
+            <a:off x="685800" y="4582120"/>
+            <a:ext cx="133350" cy="19050"/>
           </a:xfrm>
-          <a:prstGeom prst="ellipse">
-            <a:avLst>
-              <a:gd name="adj" fmla="val 50000"/>
-            </a:avLst>
+          <a:prstGeom prst="rect">
+            <a:avLst/>
           </a:prstGeom>
           <a:solidFill>
             <a:srgbClr val="1F3A8A"/>
@@ -4531,8 +4492,8 @@
         </p:nvSpPr>
         <p:spPr>
           <a:xfrm>
-            <a:off x="1162050" y="3805982"/>
-            <a:ext cx="4601909" cy="315441"/>
+            <a:off x="952500" y="4410298"/>
+            <a:ext cx="5085302" cy="362769"/>
           </a:xfrm>
           <a:prstGeom prst="rect">
             <a:avLst/>
@@ -4546,12 +4507,12 @@
           <a:p>
             <a:pPr algn="l" indent="0" marL="0">
               <a:lnSpc>
-                <a:spcPts val="2484"/>
+                <a:spcPts val="2857"/>
               </a:lnSpc>
               <a:buNone/>
             </a:pPr>
             <a:r>
-              <a:rPr lang="de-DE" altLang="en-US" sz="1800" dirty="0">
+              <a:rPr lang="de-DE" altLang="en-US" sz="2070" dirty="0">
                 <a:solidFill>
                   <a:srgbClr val="1A1D24"/>
                 </a:solidFill>
@@ -4561,7 +4522,7 @@
               </a:rPr>
               <a:t>Quartalsweises Review im Führungskreis</a:t>
             </a:r>
-            <a:endParaRPr lang="de-DE" sz="1800" dirty="0"/>
+            <a:endParaRPr lang="de-DE" sz="2070" dirty="0"/>
           </a:p>
         </p:txBody>
       </p:sp>
@@ -4574,16 +4535,11 @@
         <p:spPr>
           <a:xfrm>
             <a:off x="6229350" y="2358628"/>
-            <a:ext cx="5276850" cy="1953295"/>
+            <a:ext cx="5276850" cy="2452539"/>
           </a:xfrm>
-          <a:prstGeom prst="roundRect">
-            <a:avLst>
-              <a:gd name="adj" fmla="val 975"/>
-            </a:avLst>
+          <a:prstGeom prst="rect">
+            <a:avLst/>
           </a:prstGeom>
-          <a:solidFill>
-            <a:srgbClr val="1F3A8A"/>
-          </a:solidFill>
           <a:ln/>
         </p:spPr>
       </p:sp>
@@ -4595,8 +4551,8 @@
         </p:nvSpPr>
         <p:spPr>
           <a:xfrm>
-            <a:off x="6496050" y="2549128"/>
-            <a:ext cx="4814602" cy="302121"/>
+            <a:off x="6229350" y="2701528"/>
+            <a:ext cx="5356003" cy="392683"/>
           </a:xfrm>
           <a:prstGeom prst="rect">
             <a:avLst/>
@@ -4610,14 +4566,14 @@
           <a:p>
             <a:pPr algn="l" indent="0" marL="0">
               <a:lnSpc>
-                <a:spcPts val="2379"/>
+                <a:spcPts val="3093"/>
               </a:lnSpc>
               <a:buNone/>
             </a:pPr>
             <a:r>
-              <a:rPr lang="de-DE" altLang="en-US" sz="1950" spc="-12" kern="0" dirty="0">
+              <a:rPr lang="de-DE" altLang="en-US" sz="2535" spc="-15" kern="0" dirty="0">
                 <a:solidFill>
-                  <a:srgbClr val="FFFFFF"/>
+                  <a:srgbClr val="1F3A8A"/>
                 </a:solidFill>
                 <a:latin typeface="Source Serif 4" pitchFamily="34" charset="0"/>
                 <a:ea typeface="Source Serif 4" pitchFamily="34" charset="-122"/>
@@ -4625,7 +4581,7 @@
               </a:rPr>
               <a:t>Dafür brauchen wir</a:t>
             </a:r>
-            <a:endParaRPr lang="de-DE" sz="1950" dirty="0"/>
+            <a:endParaRPr lang="de-DE" sz="2535" dirty="0"/>
           </a:p>
         </p:txBody>
       </p:sp>
@@ -4637,8 +4593,8 @@
         </p:nvSpPr>
         <p:spPr>
           <a:xfrm>
-            <a:off x="6496050" y="2984599"/>
-            <a:ext cx="4814602" cy="946324"/>
+            <a:off x="6229350" y="3303761"/>
+            <a:ext cx="5356003" cy="1088306"/>
           </a:xfrm>
           <a:prstGeom prst="rect">
             <a:avLst/>
@@ -4652,14 +4608,14 @@
           <a:p>
             <a:pPr algn="l" indent="0" marL="0">
               <a:lnSpc>
-                <a:spcPts val="2484"/>
+                <a:spcPts val="2857"/>
               </a:lnSpc>
               <a:buNone/>
             </a:pPr>
             <a:r>
-              <a:rPr lang="de-DE" altLang="en-US" sz="1800" dirty="0">
+              <a:rPr lang="de-DE" altLang="en-US" sz="2070" dirty="0">
                 <a:solidFill>
-                  <a:srgbClr val="FFFFFF"/>
+                  <a:srgbClr val="1A1D24"/>
                 </a:solidFill>
                 <a:latin typeface="Source Sans 3" pitchFamily="34" charset="0"/>
                 <a:ea typeface="Source Sans 3" pitchFamily="34" charset="-122"/>
@@ -4667,7 +4623,7 @@
               </a:rPr>
               <a:t>Ein Investitionsbudget von 1,4 Mio € über zwei Jahre, davon 0,9 Mio € für das Kundenportal und 0,5 Mio € für die Akademie.</a:t>
             </a:r>
-            <a:endParaRPr lang="de-DE" sz="1800" dirty="0"/>
+            <a:endParaRPr lang="de-DE" sz="2070" dirty="0"/>
           </a:p>
         </p:txBody>
       </p:sp>
@@ -4680,7 +4636,7 @@
         <p:spPr>
           <a:xfrm>
             <a:off x="685800" y="6450360"/>
-            <a:ext cx="777358" cy="148530"/>
+            <a:ext cx="706661" cy="148530"/>
           </a:xfrm>
           <a:prstGeom prst="rect">
             <a:avLst/>
@@ -4707,7 +4663,7 @@
                 <a:ea typeface="Source Sans 3" pitchFamily="34" charset="-122"/>
                 <a:cs typeface="Source Sans 3" pitchFamily="34" charset="-120"/>
               </a:rPr>
-              <a:t>Strategie 2027</a:t>
+              <a:t>Weg bis 2027</a:t>
             </a:r>
             <a:endParaRPr lang="de-DE" sz="975" dirty="0"/>
           </a:p>
@@ -4721,8 +4677,8 @@
         </p:nvSpPr>
         <p:spPr>
           <a:xfrm>
-            <a:off x="11378133" y="6450360"/>
-            <a:ext cx="129988" cy="148530"/>
+            <a:off x="11149831" y="6450360"/>
+            <a:ext cx="361714" cy="148530"/>
           </a:xfrm>
           <a:prstGeom prst="rect">
             <a:avLst/>
@@ -4749,7 +4705,7 @@
                 <a:ea typeface="Source Sans 3" pitchFamily="34" charset="-122"/>
                 <a:cs typeface="Source Sans 3" pitchFamily="34" charset="-120"/>
               </a:rPr>
-              <a:t>11</a:t>
+              <a:t>11 / 12</a:t>
             </a:r>
             <a:endParaRPr lang="de-DE" sz="975" dirty="0"/>
           </a:p>
@@ -6011,16 +5967,11 @@
         <p:spPr>
           <a:xfrm>
             <a:off x="4343400" y="571500"/>
-            <a:ext cx="7162800" cy="1148655"/>
+            <a:ext cx="7162800" cy="1084287"/>
           </a:xfrm>
-          <a:prstGeom prst="roundRect">
-            <a:avLst>
-              <a:gd name="adj" fmla="val 1658"/>
-            </a:avLst>
+          <a:prstGeom prst="rect">
+            <a:avLst/>
           </a:prstGeom>
-          <a:solidFill>
-            <a:srgbClr val="E3E6ED"/>
-          </a:solidFill>
           <a:ln/>
         </p:spPr>
       </p:sp>
@@ -6032,8 +5983,8 @@
         </p:nvSpPr>
         <p:spPr>
           <a:xfrm>
-            <a:off x="4572000" y="781050"/>
-            <a:ext cx="1183333" cy="720030"/>
+            <a:off x="4572000" y="833438"/>
+            <a:ext cx="312242" cy="238869"/>
           </a:xfrm>
           <a:prstGeom prst="rect">
             <a:avLst/>
@@ -6047,12 +5998,12 @@
           <a:p>
             <a:pPr algn="l" indent="0" marL="0">
               <a:lnSpc>
-                <a:spcPts val="5670"/>
+                <a:spcPts val="1881"/>
               </a:lnSpc>
               <a:buNone/>
             </a:pPr>
             <a:r>
-              <a:rPr lang="de-DE" altLang="en-US" sz="5400" spc="-162" kern="0" dirty="0">
+              <a:rPr lang="de-DE" altLang="en-US" sz="1425" spc="-43" kern="0" dirty="0">
                 <a:solidFill>
                   <a:srgbClr val="1F3A8A"/>
                 </a:solidFill>
@@ -6062,7 +6013,7 @@
               </a:rPr>
               <a:t>01</a:t>
             </a:r>
-            <a:endParaRPr lang="de-DE" sz="5400" dirty="0"/>
+            <a:endParaRPr lang="de-DE" sz="1425" dirty="0"/>
           </a:p>
         </p:txBody>
       </p:sp>
@@ -6076,8 +6027,8 @@
         </p:nvSpPr>
         <p:spPr>
           <a:xfrm>
-            <a:off x="6004545" y="813197"/>
-            <a:ext cx="5352151" cy="302121"/>
+            <a:off x="5146328" y="781050"/>
+            <a:ext cx="6223241" cy="302121"/>
           </a:xfrm>
           <a:prstGeom prst="rect">
             <a:avLst/>
@@ -6098,7 +6049,7 @@
             <a:r>
               <a:rPr lang="de-DE" altLang="en-US" sz="1950" spc="-12" kern="0" dirty="0">
                 <a:solidFill>
-                  <a:srgbClr val="1A1D24"/>
+                  <a:srgbClr val="1F3A8A"/>
                 </a:solidFill>
                 <a:latin typeface="Source Serif 4" pitchFamily="34" charset="0"/>
                 <a:ea typeface="Source Serif 4" pitchFamily="34" charset="-122"/>
@@ -6118,8 +6069,8 @@
         </p:nvSpPr>
         <p:spPr>
           <a:xfrm>
-            <a:off x="6004545" y="1153418"/>
-            <a:ext cx="5352151" cy="315441"/>
+            <a:off x="5146328" y="1121271"/>
+            <a:ext cx="6223241" cy="315441"/>
           </a:xfrm>
           <a:prstGeom prst="rect">
             <a:avLst/>
@@ -6160,8 +6111,8 @@
         </p:nvSpPr>
         <p:spPr>
           <a:xfrm>
-            <a:off x="4572000" y="1929705"/>
-            <a:ext cx="1183333" cy="720030"/>
+            <a:off x="4572000" y="1917725"/>
+            <a:ext cx="312242" cy="238869"/>
           </a:xfrm>
           <a:prstGeom prst="rect">
             <a:avLst/>
@@ -6175,12 +6126,12 @@
           <a:p>
             <a:pPr algn="l" indent="0" marL="0">
               <a:lnSpc>
-                <a:spcPts val="5670"/>
+                <a:spcPts val="1881"/>
               </a:lnSpc>
               <a:buNone/>
             </a:pPr>
             <a:r>
-              <a:rPr lang="de-DE" altLang="en-US" sz="5400" spc="-162" kern="0" dirty="0">
+              <a:rPr lang="de-DE" altLang="en-US" sz="1425" spc="-43" kern="0" dirty="0">
                 <a:solidFill>
                   <a:srgbClr val="1F3A8A"/>
                 </a:solidFill>
@@ -6190,7 +6141,7 @@
               </a:rPr>
               <a:t>02</a:t>
             </a:r>
-            <a:endParaRPr lang="de-DE" sz="5400" dirty="0"/>
+            <a:endParaRPr lang="de-DE" sz="1425" dirty="0"/>
           </a:p>
         </p:txBody>
       </p:sp>
@@ -6204,8 +6155,8 @@
         </p:nvSpPr>
         <p:spPr>
           <a:xfrm>
-            <a:off x="6004545" y="1961852"/>
-            <a:ext cx="5352151" cy="302121"/>
+            <a:off x="5146328" y="1865337"/>
+            <a:ext cx="6223241" cy="302121"/>
           </a:xfrm>
           <a:prstGeom prst="rect">
             <a:avLst/>
@@ -6246,8 +6197,8 @@
         </p:nvSpPr>
         <p:spPr>
           <a:xfrm>
-            <a:off x="6004545" y="2302073"/>
-            <a:ext cx="5352151" cy="315441"/>
+            <a:off x="5146328" y="2205558"/>
+            <a:ext cx="6223241" cy="315441"/>
           </a:xfrm>
           <a:prstGeom prst="rect">
             <a:avLst/>
@@ -6288,8 +6239,8 @@
         </p:nvSpPr>
         <p:spPr>
           <a:xfrm>
-            <a:off x="4572000" y="3078361"/>
-            <a:ext cx="1183333" cy="720030"/>
+            <a:off x="4572000" y="3002012"/>
+            <a:ext cx="312242" cy="238869"/>
           </a:xfrm>
           <a:prstGeom prst="rect">
             <a:avLst/>
@@ -6303,12 +6254,12 @@
           <a:p>
             <a:pPr algn="l" indent="0" marL="0">
               <a:lnSpc>
-                <a:spcPts val="5670"/>
+                <a:spcPts val="1881"/>
               </a:lnSpc>
               <a:buNone/>
             </a:pPr>
             <a:r>
-              <a:rPr lang="de-DE" altLang="en-US" sz="5400" spc="-162" kern="0" dirty="0">
+              <a:rPr lang="de-DE" altLang="en-US" sz="1425" spc="-43" kern="0" dirty="0">
                 <a:solidFill>
                   <a:srgbClr val="1F3A8A"/>
                 </a:solidFill>
@@ -6318,7 +6269,7 @@
               </a:rPr>
               <a:t>03</a:t>
             </a:r>
-            <a:endParaRPr lang="de-DE" sz="5400" dirty="0"/>
+            <a:endParaRPr lang="de-DE" sz="1425" dirty="0"/>
           </a:p>
         </p:txBody>
       </p:sp>
@@ -6330,8 +6281,8 @@
         </p:nvSpPr>
         <p:spPr>
           <a:xfrm>
-            <a:off x="6004545" y="3110508"/>
-            <a:ext cx="5352151" cy="302121"/>
+            <a:off x="5146328" y="2949625"/>
+            <a:ext cx="6223241" cy="302121"/>
           </a:xfrm>
           <a:prstGeom prst="rect">
             <a:avLst/>
@@ -6372,8 +6323,8 @@
         </p:nvSpPr>
         <p:spPr>
           <a:xfrm>
-            <a:off x="6004545" y="3450729"/>
-            <a:ext cx="5352151" cy="315441"/>
+            <a:off x="5146328" y="3289846"/>
+            <a:ext cx="6223241" cy="315441"/>
           </a:xfrm>
           <a:prstGeom prst="rect">
             <a:avLst/>
@@ -6414,8 +6365,8 @@
         </p:nvSpPr>
         <p:spPr>
           <a:xfrm>
-            <a:off x="4572000" y="4227016"/>
-            <a:ext cx="1183333" cy="720030"/>
+            <a:off x="4572000" y="4086299"/>
+            <a:ext cx="312242" cy="238869"/>
           </a:xfrm>
           <a:prstGeom prst="rect">
             <a:avLst/>
@@ -6429,12 +6380,12 @@
           <a:p>
             <a:pPr algn="l" indent="0" marL="0">
               <a:lnSpc>
-                <a:spcPts val="5670"/>
+                <a:spcPts val="1881"/>
               </a:lnSpc>
               <a:buNone/>
             </a:pPr>
             <a:r>
-              <a:rPr lang="de-DE" altLang="en-US" sz="5400" spc="-162" kern="0" dirty="0">
+              <a:rPr lang="de-DE" altLang="en-US" sz="1425" spc="-43" kern="0" dirty="0">
                 <a:solidFill>
                   <a:srgbClr val="1F3A8A"/>
                 </a:solidFill>
@@ -6444,7 +6395,7 @@
               </a:rPr>
               <a:t>04</a:t>
             </a:r>
-            <a:endParaRPr lang="de-DE" sz="5400" dirty="0"/>
+            <a:endParaRPr lang="de-DE" sz="1425" dirty="0"/>
           </a:p>
         </p:txBody>
       </p:sp>
@@ -6456,8 +6407,8 @@
         </p:nvSpPr>
         <p:spPr>
           <a:xfrm>
-            <a:off x="6004545" y="4259163"/>
-            <a:ext cx="5352151" cy="302121"/>
+            <a:off x="5146328" y="4033912"/>
+            <a:ext cx="6223241" cy="302121"/>
           </a:xfrm>
           <a:prstGeom prst="rect">
             <a:avLst/>
@@ -6498,8 +6449,8 @@
         </p:nvSpPr>
         <p:spPr>
           <a:xfrm>
-            <a:off x="6004545" y="4599384"/>
-            <a:ext cx="5352151" cy="315441"/>
+            <a:off x="5146328" y="4374133"/>
+            <a:ext cx="6223241" cy="315441"/>
           </a:xfrm>
           <a:prstGeom prst="rect">
             <a:avLst/>
@@ -6534,14 +6485,14 @@
       </p:sp>
       <p:sp>
         <p:nvSpPr>
-          <p:cNvPr id="16" name="dw:_footer.title"/>
+          <p:cNvPr id="16" name="dw:_footer.page"/>
           <p:cNvSpPr/>
           <p:nvPr/>
         </p:nvSpPr>
         <p:spPr>
           <a:xfrm>
-            <a:off x="685800" y="6450360"/>
-            <a:ext cx="777358" cy="148530"/>
+            <a:off x="11213827" y="6450360"/>
+            <a:ext cx="296758" cy="148530"/>
           </a:xfrm>
           <a:prstGeom prst="rect">
             <a:avLst/>
@@ -6568,49 +6519,7 @@
                 <a:ea typeface="Source Sans 3" pitchFamily="34" charset="-122"/>
                 <a:cs typeface="Source Sans 3" pitchFamily="34" charset="-120"/>
               </a:rPr>
-              <a:t>Strategie 2027</a:t>
-            </a:r>
-            <a:endParaRPr lang="de-DE" sz="975" dirty="0"/>
-          </a:p>
-        </p:txBody>
-      </p:sp>
-      <p:sp>
-        <p:nvSpPr>
-          <p:cNvPr id="17" name="dw:_footer.page"/>
-          <p:cNvSpPr/>
-          <p:nvPr/>
-        </p:nvSpPr>
-        <p:spPr>
-          <a:xfrm>
-            <a:off x="11442129" y="6450360"/>
-            <a:ext cx="65032" cy="148530"/>
-          </a:xfrm>
-          <a:prstGeom prst="rect">
-            <a:avLst/>
-          </a:prstGeom>
-          <a:noFill/>
-          <a:ln/>
-        </p:spPr>
-        <p:txBody>
-          <a:bodyPr wrap="square" lIns="0" tIns="0" rIns="0" bIns="0" rtlCol="0" anchor="t"/>
-          <a:lstStyle/>
-          <a:p>
-            <a:pPr algn="l" indent="0" marL="0">
-              <a:lnSpc>
-                <a:spcPts val="1170"/>
-              </a:lnSpc>
-              <a:buNone/>
-            </a:pPr>
-            <a:r>
-              <a:rPr lang="de-DE" altLang="en-US" sz="975" spc="20" kern="0" dirty="0">
-                <a:solidFill>
-                  <a:srgbClr val="5E6168"/>
-                </a:solidFill>
-                <a:latin typeface="Source Sans 3" pitchFamily="34" charset="0"/>
-                <a:ea typeface="Source Sans 3" pitchFamily="34" charset="-122"/>
-                <a:cs typeface="Source Sans 3" pitchFamily="34" charset="-120"/>
-              </a:rPr>
-              <a:t>2</a:t>
+              <a:t>2 / 12</a:t>
             </a:r>
             <a:endParaRPr lang="de-DE" sz="975" dirty="0"/>
           </a:p>
@@ -7785,8 +7694,8 @@
         </p:nvSpPr>
         <p:spPr>
           <a:xfrm>
-            <a:off x="685800" y="2106513"/>
-            <a:ext cx="9474518" cy="936129"/>
+            <a:off x="685800" y="571500"/>
+            <a:ext cx="9474518" cy="1714500"/>
           </a:xfrm>
           <a:prstGeom prst="rect">
             <a:avLst/>
@@ -7800,12 +7709,12 @@
           <a:p>
             <a:pPr algn="l" indent="0" marL="0">
               <a:lnSpc>
-                <a:spcPts val="7371"/>
+                <a:spcPts val="13500"/>
               </a:lnSpc>
               <a:buNone/>
             </a:pPr>
             <a:r>
-              <a:rPr lang="de-DE" altLang="en-US" sz="6954" spc="-83" kern="0" dirty="0">
+              <a:rPr lang="de-DE" altLang="en-US" sz="15000" spc="-600" kern="0" dirty="0">
                 <a:solidFill>
                   <a:srgbClr val="A4A5A6"/>
                 </a:solidFill>
@@ -7815,7 +7724,7 @@
               </a:rPr>
               <a:t>01</a:t>
             </a:r>
-            <a:endParaRPr lang="de-DE" sz="6954" dirty="0"/>
+            <a:endParaRPr lang="de-DE" sz="15000" dirty="0"/>
           </a:p>
         </p:txBody>
       </p:sp>
@@ -7827,7 +7736,7 @@
         </p:nvSpPr>
         <p:spPr>
           <a:xfrm>
-            <a:off x="685800" y="3214092"/>
+            <a:off x="685800" y="4634880"/>
             <a:ext cx="9474518" cy="936129"/>
           </a:xfrm>
           <a:prstGeom prst="rect">
@@ -7869,7 +7778,7 @@
         </p:nvSpPr>
         <p:spPr>
           <a:xfrm>
-            <a:off x="685800" y="4321671"/>
+            <a:off x="685800" y="5742459"/>
             <a:ext cx="7540943" cy="315441"/>
           </a:xfrm>
           <a:prstGeom prst="rect">
@@ -7953,7 +7862,7 @@
         </p:nvSpPr>
         <p:spPr>
           <a:xfrm>
-            <a:off x="5533376" y="1462534"/>
+            <a:off x="685800" y="1462534"/>
             <a:ext cx="1125174" cy="159990"/>
           </a:xfrm>
           <a:prstGeom prst="rect">
@@ -7966,7 +7875,7 @@
           <a:bodyPr wrap="square" lIns="0" tIns="0" rIns="0" bIns="0" rtlCol="0" anchor="t"/>
           <a:lstStyle/>
           <a:p>
-            <a:pPr algn="ctr" indent="0" marL="0">
+            <a:pPr algn="l" indent="0" marL="0">
               <a:lnSpc>
                 <a:spcPts val="1260"/>
               </a:lnSpc>
@@ -7995,7 +7904,7 @@
         </p:nvSpPr>
         <p:spPr>
           <a:xfrm>
-            <a:off x="1068705" y="1908274"/>
+            <a:off x="685800" y="1908274"/>
             <a:ext cx="10054590" cy="2695873"/>
           </a:xfrm>
           <a:prstGeom prst="rect">
@@ -8008,7 +7917,7 @@
           <a:bodyPr wrap="square" lIns="0" tIns="0" rIns="0" bIns="0" rtlCol="0" anchor="t"/>
           <a:lstStyle/>
           <a:p>
-            <a:pPr algn="ctr" indent="0" marL="0">
+            <a:pPr algn="l" indent="0" marL="0">
               <a:lnSpc>
                 <a:spcPts val="5307"/>
               </a:lnSpc>
@@ -8025,7 +7934,7 @@
               </a:rPr>
               <a:t>Für </a:t>
             </a:r>
-            <a:pPr algn="ctr" indent="0" marL="0">
+            <a:pPr algn="l" indent="0" marL="0">
               <a:lnSpc>
                 <a:spcPts val="5307"/>
               </a:lnSpc>
@@ -8045,7 +7954,7 @@
             <a:endParaRPr lang="de-DE" sz="4575" dirty="0"/>
           </a:p>
           <a:p>
-            <a:pPr algn="ctr" indent="0" marL="0">
+            <a:pPr algn="l" indent="0" marL="0">
               <a:lnSpc>
                 <a:spcPts val="5307"/>
               </a:lnSpc>
@@ -8065,7 +7974,7 @@
             <a:endParaRPr lang="de-DE" sz="4575" dirty="0"/>
           </a:p>
           <a:p>
-            <a:pPr algn="ctr" indent="0" marL="0">
+            <a:pPr algn="l" indent="0" marL="0">
               <a:lnSpc>
                 <a:spcPts val="5307"/>
               </a:lnSpc>
@@ -8085,7 +7994,7 @@
             <a:endParaRPr lang="de-DE" sz="4575" dirty="0"/>
           </a:p>
           <a:p>
-            <a:pPr algn="ctr" indent="0" marL="0">
+            <a:pPr algn="l" indent="0" marL="0">
               <a:lnSpc>
                 <a:spcPts val="5307"/>
               </a:lnSpc>
@@ -8114,7 +8023,7 @@
         </p:nvSpPr>
         <p:spPr>
           <a:xfrm>
-            <a:off x="4259331" y="5042297"/>
+            <a:off x="685800" y="5042297"/>
             <a:ext cx="3673264" cy="238869"/>
           </a:xfrm>
           <a:prstGeom prst="rect">
@@ -8127,7 +8036,7 @@
           <a:bodyPr wrap="square" lIns="0" tIns="0" rIns="0" bIns="0" rtlCol="0" anchor="t"/>
           <a:lstStyle/>
           <a:p>
-            <a:pPr algn="ctr" indent="0" marL="0">
+            <a:pPr algn="l" indent="0" marL="0">
               <a:lnSpc>
                 <a:spcPts val="1881"/>
               </a:lnSpc>
@@ -8488,14 +8397,9 @@
             <a:off x="8362950" y="2358628"/>
             <a:ext cx="3143250" cy="3493591"/>
           </a:xfrm>
-          <a:prstGeom prst="roundRect">
-            <a:avLst>
-              <a:gd name="adj" fmla="val 606"/>
-            </a:avLst>
+          <a:prstGeom prst="rect">
+            <a:avLst/>
           </a:prstGeom>
-          <a:solidFill>
-            <a:srgbClr val="E3E6ED"/>
-          </a:solidFill>
           <a:ln/>
         </p:spPr>
       </p:sp>
@@ -8507,8 +8411,8 @@
         </p:nvSpPr>
         <p:spPr>
           <a:xfrm>
-            <a:off x="8667750" y="3057376"/>
-            <a:ext cx="2571655" cy="720030"/>
+            <a:off x="8362950" y="2625328"/>
+            <a:ext cx="3190399" cy="720030"/>
           </a:xfrm>
           <a:prstGeom prst="rect">
             <a:avLst/>
@@ -8549,8 +8453,8 @@
         </p:nvSpPr>
         <p:spPr>
           <a:xfrm>
-            <a:off x="8667750" y="3891707"/>
-            <a:ext cx="2571655" cy="1261765"/>
+            <a:off x="8362950" y="3459659"/>
+            <a:ext cx="3190399" cy="946324"/>
           </a:xfrm>
           <a:prstGeom prst="rect">
             <a:avLst/>
@@ -8634,7 +8538,7 @@
         <p:spPr>
           <a:xfrm>
             <a:off x="685800" y="6450360"/>
-            <a:ext cx="777358" cy="148530"/>
+            <a:ext cx="747448" cy="148530"/>
           </a:xfrm>
           <a:prstGeom prst="rect">
             <a:avLst/>
@@ -8661,7 +8565,7 @@
                 <a:ea typeface="Source Sans 3" pitchFamily="34" charset="-122"/>
                 <a:cs typeface="Source Sans 3" pitchFamily="34" charset="-120"/>
               </a:rPr>
-              <a:t>Strategie 2027</a:t>
+              <a:t>Ausgangslage</a:t>
             </a:r>
             <a:endParaRPr lang="de-DE" sz="975" dirty="0"/>
           </a:p>
@@ -8675,8 +8579,8 @@
         </p:nvSpPr>
         <p:spPr>
           <a:xfrm>
-            <a:off x="11442129" y="6450360"/>
-            <a:ext cx="65032" cy="148530"/>
+            <a:off x="11213827" y="6450360"/>
+            <a:ext cx="296758" cy="148530"/>
           </a:xfrm>
           <a:prstGeom prst="rect">
             <a:avLst/>
@@ -8703,7 +8607,7 @@
                 <a:ea typeface="Source Sans 3" pitchFamily="34" charset="-122"/>
                 <a:cs typeface="Source Sans 3" pitchFamily="34" charset="-120"/>
               </a:rPr>
-              <a:t>5</a:t>
+              <a:t>5 / 12</a:t>
             </a:r>
             <a:endParaRPr lang="de-DE" sz="975" dirty="0"/>
           </a:p>
@@ -8967,8 +8871,8 @@
         </p:nvSpPr>
         <p:spPr>
           <a:xfrm>
-            <a:off x="685800" y="2106513"/>
-            <a:ext cx="9474518" cy="936129"/>
+            <a:off x="685800" y="571500"/>
+            <a:ext cx="9474518" cy="1714500"/>
           </a:xfrm>
           <a:prstGeom prst="rect">
             <a:avLst/>
@@ -8982,12 +8886,12 @@
           <a:p>
             <a:pPr algn="l" indent="0" marL="0">
               <a:lnSpc>
-                <a:spcPts val="7371"/>
+                <a:spcPts val="13500"/>
               </a:lnSpc>
               <a:buNone/>
             </a:pPr>
             <a:r>
-              <a:rPr lang="de-DE" altLang="en-US" sz="6954" spc="-83" kern="0" dirty="0">
+              <a:rPr lang="de-DE" altLang="en-US" sz="15000" spc="-600" kern="0" dirty="0">
                 <a:solidFill>
                   <a:srgbClr val="A4A5A6"/>
                 </a:solidFill>
@@ -8997,7 +8901,7 @@
               </a:rPr>
               <a:t>02</a:t>
             </a:r>
-            <a:endParaRPr lang="de-DE" sz="6954" dirty="0"/>
+            <a:endParaRPr lang="de-DE" sz="15000" dirty="0"/>
           </a:p>
         </p:txBody>
       </p:sp>
@@ -9009,7 +8913,7 @@
         </p:nvSpPr>
         <p:spPr>
           <a:xfrm>
-            <a:off x="685800" y="3214092"/>
+            <a:off x="685800" y="4634880"/>
             <a:ext cx="9474518" cy="936129"/>
           </a:xfrm>
           <a:prstGeom prst="rect">
@@ -9051,7 +8955,7 @@
         </p:nvSpPr>
         <p:spPr>
           <a:xfrm>
-            <a:off x="685800" y="4321671"/>
+            <a:off x="685800" y="5742459"/>
             <a:ext cx="7540943" cy="315441"/>
           </a:xfrm>
           <a:prstGeom prst="rect">
@@ -9240,16 +9144,11 @@
         <p:spPr>
           <a:xfrm>
             <a:off x="685800" y="2358628"/>
-            <a:ext cx="3454375" cy="2619152"/>
+            <a:ext cx="3454375" cy="2476500"/>
           </a:xfrm>
-          <a:prstGeom prst="roundRect">
-            <a:avLst>
-              <a:gd name="adj" fmla="val 727"/>
-            </a:avLst>
+          <a:prstGeom prst="rect">
+            <a:avLst/>
           </a:prstGeom>
-          <a:solidFill>
-            <a:srgbClr val="F3F1EC"/>
-          </a:solidFill>
           <a:ln/>
         </p:spPr>
       </p:sp>
@@ -9261,7 +9160,7 @@
         </p:nvSpPr>
         <p:spPr>
           <a:xfrm>
-            <a:off x="952500" y="2663428"/>
+            <a:off x="685800" y="2625328"/>
             <a:ext cx="381000" cy="381000"/>
           </a:xfrm>
           <a:prstGeom prst="rect">
@@ -9286,7 +9185,7 @@
         </p:blipFill>
         <p:spPr>
           <a:xfrm>
-            <a:off x="1019175" y="2730103"/>
+            <a:off x="752475" y="2692003"/>
             <a:ext cx="247650" cy="247650"/>
           </a:xfrm>
           <a:prstGeom prst="rect">
@@ -9302,8 +9201,8 @@
         </p:nvSpPr>
         <p:spPr>
           <a:xfrm>
-            <a:off x="952500" y="3339703"/>
-            <a:ext cx="2964790" cy="519559"/>
+            <a:off x="685800" y="3301603"/>
+            <a:ext cx="3506191" cy="519559"/>
           </a:xfrm>
           <a:prstGeom prst="rect">
             <a:avLst/>
@@ -9364,8 +9263,8 @@
         </p:nvSpPr>
         <p:spPr>
           <a:xfrm>
-            <a:off x="952500" y="3935462"/>
-            <a:ext cx="2964790" cy="477738"/>
+            <a:off x="685800" y="3897362"/>
+            <a:ext cx="3506191" cy="477738"/>
           </a:xfrm>
           <a:prstGeom prst="rect">
             <a:avLst/>
@@ -9407,16 +9306,11 @@
         <p:spPr>
           <a:xfrm>
             <a:off x="4368775" y="2358628"/>
-            <a:ext cx="3454375" cy="2619152"/>
+            <a:ext cx="3454375" cy="2476500"/>
           </a:xfrm>
-          <a:prstGeom prst="roundRect">
-            <a:avLst>
-              <a:gd name="adj" fmla="val 727"/>
-            </a:avLst>
+          <a:prstGeom prst="rect">
+            <a:avLst/>
           </a:prstGeom>
-          <a:solidFill>
-            <a:srgbClr val="F3F1EC"/>
-          </a:solidFill>
           <a:ln/>
         </p:spPr>
       </p:sp>
@@ -9428,7 +9322,7 @@
         </p:nvSpPr>
         <p:spPr>
           <a:xfrm>
-            <a:off x="4635475" y="2663428"/>
+            <a:off x="4368775" y="2625328"/>
             <a:ext cx="381000" cy="381000"/>
           </a:xfrm>
           <a:prstGeom prst="rect">
@@ -9453,7 +9347,7 @@
         </p:blipFill>
         <p:spPr>
           <a:xfrm>
-            <a:off x="4702150" y="2730103"/>
+            <a:off x="4435450" y="2692003"/>
             <a:ext cx="247650" cy="247650"/>
           </a:xfrm>
           <a:prstGeom prst="rect">
@@ -9469,8 +9363,8 @@
         </p:nvSpPr>
         <p:spPr>
           <a:xfrm>
-            <a:off x="4635475" y="3339703"/>
-            <a:ext cx="2964790" cy="779338"/>
+            <a:off x="4368775" y="3301603"/>
+            <a:ext cx="3506191" cy="519559"/>
           </a:xfrm>
           <a:prstGeom prst="rect">
             <a:avLst/>
@@ -9497,7 +9391,7 @@
                 <a:ea typeface="Source Serif 4" pitchFamily="34" charset="-122"/>
                 <a:cs typeface="Source Serif 4" pitchFamily="34" charset="-120"/>
               </a:rPr>
-              <a:t>Digitalisierung:</a:t>
+              <a:t>Digitalisierung: Ein</a:t>
             </a:r>
             <a:endParaRPr lang="de-DE" sz="1650" dirty="0"/>
           </a:p>
@@ -9517,27 +9411,7 @@
                 <a:ea typeface="Source Serif 4" pitchFamily="34" charset="-122"/>
                 <a:cs typeface="Source Serif 4" pitchFamily="34" charset="-120"/>
               </a:rPr>
-              <a:t>Ein Kundenportal</a:t>
-            </a:r>
-            <a:endParaRPr lang="de-DE" sz="1650" dirty="0"/>
-          </a:p>
-          <a:p>
-            <a:pPr algn="l" indent="0" marL="0">
-              <a:lnSpc>
-                <a:spcPts val="2046"/>
-              </a:lnSpc>
-              <a:buNone/>
-            </a:pPr>
-            <a:r>
-              <a:rPr lang="de-DE" altLang="en-US" sz="1650" b="1" spc="-10" kern="0" dirty="0">
-                <a:solidFill>
-                  <a:srgbClr val="1A1D24"/>
-                </a:solidFill>
-                <a:latin typeface="Source Serif 4" pitchFamily="34" charset="0"/>
-                <a:ea typeface="Source Serif 4" pitchFamily="34" charset="-122"/>
-                <a:cs typeface="Source Serif 4" pitchFamily="34" charset="-120"/>
-              </a:rPr>
-              <a:t>statt vier Kanälen</a:t>
+              <a:t>Kundenportal statt vier Kanälen</a:t>
             </a:r>
             <a:endParaRPr lang="de-DE" sz="1650" dirty="0"/>
           </a:p>
@@ -9551,8 +9425,8 @@
         </p:nvSpPr>
         <p:spPr>
           <a:xfrm>
-            <a:off x="4635475" y="4195242"/>
-            <a:ext cx="2964790" cy="477738"/>
+            <a:off x="4368775" y="3897362"/>
+            <a:ext cx="3506191" cy="477738"/>
           </a:xfrm>
           <a:prstGeom prst="rect">
             <a:avLst/>
@@ -9594,16 +9468,11 @@
         <p:spPr>
           <a:xfrm>
             <a:off x="8051750" y="2358628"/>
-            <a:ext cx="3454375" cy="2619152"/>
+            <a:ext cx="3454375" cy="2476500"/>
           </a:xfrm>
-          <a:prstGeom prst="roundRect">
-            <a:avLst>
-              <a:gd name="adj" fmla="val 727"/>
-            </a:avLst>
+          <a:prstGeom prst="rect">
+            <a:avLst/>
           </a:prstGeom>
-          <a:solidFill>
-            <a:srgbClr val="F3F1EC"/>
-          </a:solidFill>
           <a:ln/>
         </p:spPr>
       </p:sp>
@@ -9615,7 +9484,7 @@
         </p:nvSpPr>
         <p:spPr>
           <a:xfrm>
-            <a:off x="8318450" y="2663428"/>
+            <a:off x="8051750" y="2625328"/>
             <a:ext cx="381000" cy="381000"/>
           </a:xfrm>
           <a:prstGeom prst="rect">
@@ -9640,7 +9509,7 @@
         </p:blipFill>
         <p:spPr>
           <a:xfrm>
-            <a:off x="8385125" y="2730103"/>
+            <a:off x="8118425" y="2692003"/>
             <a:ext cx="247650" cy="247650"/>
           </a:xfrm>
           <a:prstGeom prst="rect">
@@ -9656,8 +9525,8 @@
         </p:nvSpPr>
         <p:spPr>
           <a:xfrm>
-            <a:off x="8318450" y="3339703"/>
-            <a:ext cx="2964790" cy="519559"/>
+            <a:off x="8051750" y="3301603"/>
+            <a:ext cx="3506191" cy="519559"/>
           </a:xfrm>
           <a:prstGeom prst="rect">
             <a:avLst/>
@@ -9718,8 +9587,8 @@
         </p:nvSpPr>
         <p:spPr>
           <a:xfrm>
-            <a:off x="8318450" y="3935462"/>
-            <a:ext cx="2964790" cy="477738"/>
+            <a:off x="8051750" y="3897362"/>
+            <a:ext cx="3506191" cy="238869"/>
           </a:xfrm>
           <a:prstGeom prst="rect">
             <a:avLst/>
@@ -9761,7 +9630,7 @@
         <p:spPr>
           <a:xfrm>
             <a:off x="685800" y="6450360"/>
-            <a:ext cx="777358" cy="148530"/>
+            <a:ext cx="1038919" cy="148530"/>
           </a:xfrm>
           <a:prstGeom prst="rect">
             <a:avLst/>
@@ -9788,7 +9657,7 @@
                 <a:ea typeface="Source Sans 3" pitchFamily="34" charset="-122"/>
                 <a:cs typeface="Source Sans 3" pitchFamily="34" charset="-120"/>
               </a:rPr>
-              <a:t>Strategie 2027</a:t>
+              <a:t>Drei Schwerpunkte</a:t>
             </a:r>
             <a:endParaRPr lang="de-DE" sz="975" dirty="0"/>
           </a:p>
@@ -9802,8 +9671,8 @@
         </p:nvSpPr>
         <p:spPr>
           <a:xfrm>
-            <a:off x="11442129" y="6450360"/>
-            <a:ext cx="65032" cy="148530"/>
+            <a:off x="11213827" y="6450360"/>
+            <a:ext cx="296758" cy="148530"/>
           </a:xfrm>
           <a:prstGeom prst="rect">
             <a:avLst/>
@@ -9830,7 +9699,7 @@
                 <a:ea typeface="Source Sans 3" pitchFamily="34" charset="-122"/>
                 <a:cs typeface="Source Sans 3" pitchFamily="34" charset="-120"/>
               </a:rPr>
-              <a:t>7</a:t>
+              <a:t>7 / 12</a:t>
             </a:r>
             <a:endParaRPr lang="de-DE" sz="975" dirty="0"/>
           </a:p>
@@ -11166,8 +11035,8 @@
         </p:nvSpPr>
         <p:spPr>
           <a:xfrm>
-            <a:off x="685800" y="2106513"/>
-            <a:ext cx="9474518" cy="936129"/>
+            <a:off x="685800" y="571500"/>
+            <a:ext cx="9474518" cy="1714500"/>
           </a:xfrm>
           <a:prstGeom prst="rect">
             <a:avLst/>
@@ -11181,12 +11050,12 @@
           <a:p>
             <a:pPr algn="l" indent="0" marL="0">
               <a:lnSpc>
-                <a:spcPts val="7371"/>
+                <a:spcPts val="13500"/>
               </a:lnSpc>
               <a:buNone/>
             </a:pPr>
             <a:r>
-              <a:rPr lang="de-DE" altLang="en-US" sz="6954" spc="-83" kern="0" dirty="0">
+              <a:rPr lang="de-DE" altLang="en-US" sz="15000" spc="-600" kern="0" dirty="0">
                 <a:solidFill>
                   <a:srgbClr val="A4A5A6"/>
                 </a:solidFill>
@@ -11196,7 +11065,7 @@
               </a:rPr>
               <a:t>03</a:t>
             </a:r>
-            <a:endParaRPr lang="de-DE" sz="6954" dirty="0"/>
+            <a:endParaRPr lang="de-DE" sz="15000" dirty="0"/>
           </a:p>
         </p:txBody>
       </p:sp>
@@ -11208,7 +11077,7 @@
         </p:nvSpPr>
         <p:spPr>
           <a:xfrm>
-            <a:off x="685800" y="3214092"/>
+            <a:off x="685800" y="4634880"/>
             <a:ext cx="9474518" cy="936129"/>
           </a:xfrm>
           <a:prstGeom prst="rect">
@@ -11250,7 +11119,7 @@
         </p:nvSpPr>
         <p:spPr>
           <a:xfrm>
-            <a:off x="685800" y="4321671"/>
+            <a:off x="685800" y="5742459"/>
             <a:ext cx="7540943" cy="315441"/>
           </a:xfrm>
           <a:prstGeom prst="rect">
@@ -11439,7 +11308,7 @@
         <p:spPr>
           <a:xfrm>
             <a:off x="685800" y="2358628"/>
-            <a:ext cx="2419350" cy="2478286"/>
+            <a:ext cx="2505075" cy="2478286"/>
           </a:xfrm>
           <a:prstGeom prst="rect">
             <a:avLst/>
@@ -11449,31 +11318,14 @@
       </p:sp>
       <p:sp>
         <p:nvSpPr>
-          <p:cNvPr id="5" name="dw:_badge.0"/>
+          <p:cNvPr id="5" name="dw:_n.0"/>
           <p:cNvSpPr/>
           <p:nvPr/>
         </p:nvSpPr>
         <p:spPr>
           <a:xfrm>
-            <a:off x="685800" y="2668191"/>
-            <a:ext cx="95622" cy="180975"/>
-          </a:xfrm>
-          <a:prstGeom prst="ellipse">
-            <a:avLst/>
-          </a:prstGeom>
-          <a:ln/>
-        </p:spPr>
-      </p:sp>
-      <p:sp>
-        <p:nvSpPr>
-          <p:cNvPr id="6" name="dw:_n.0"/>
-          <p:cNvSpPr/>
-          <p:nvPr/>
-        </p:nvSpPr>
-        <p:spPr>
-          <a:xfrm>
-            <a:off x="685800" y="2668191"/>
-            <a:ext cx="97056" cy="180975"/>
+            <a:off x="685800" y="2639244"/>
+            <a:ext cx="189959" cy="238869"/>
           </a:xfrm>
           <a:prstGeom prst="rect">
             <a:avLst/>
@@ -11487,20 +11339,20 @@
           <a:p>
             <a:pPr algn="l" indent="0" marL="0">
               <a:lnSpc>
-                <a:spcPts val="1425"/>
+                <a:spcPts val="1881"/>
               </a:lnSpc>
               <a:buNone/>
             </a:pPr>
             <a:r>
-              <a:rPr lang="de-DE" altLang="en-US" sz="1425" b="1" dirty="0">
+              <a:rPr lang="de-DE" altLang="en-US" sz="1425" spc="-17" kern="0" dirty="0">
                 <a:solidFill>
                   <a:srgbClr val="1F3A8A"/>
                 </a:solidFill>
-                <a:latin typeface="Source Sans 3" pitchFamily="34" charset="0"/>
-                <a:ea typeface="Source Sans 3" pitchFamily="34" charset="-122"/>
-                <a:cs typeface="Source Sans 3" pitchFamily="34" charset="-120"/>
+                <a:latin typeface="Source Serif 4" pitchFamily="34" charset="0"/>
+                <a:ea typeface="Source Serif 4" pitchFamily="34" charset="-122"/>
+                <a:cs typeface="Source Serif 4" pitchFamily="34" charset="-120"/>
               </a:rPr>
-              <a:t>1</a:t>
+              <a:t>01</a:t>
             </a:r>
             <a:endParaRPr lang="de-DE" sz="1425" dirty="0"/>
           </a:p>
@@ -11508,7 +11360,7 @@
       </p:sp>
       <p:pic>
         <p:nvPicPr>
-          <p:cNvPr id="7" name="dw:_icon.0" descr="preencoded.png">    </p:cNvPr>
+          <p:cNvPr id="6" name="dw:_icon.0" descr="preencoded.png">    </p:cNvPr>
           <p:cNvPicPr>
             <a:picLocks noChangeAspect="1"/>
           </p:cNvPicPr>
@@ -11522,7 +11374,7 @@
         </p:blipFill>
         <p:spPr>
           <a:xfrm>
-            <a:off x="2724150" y="2625328"/>
+            <a:off x="2809875" y="2625328"/>
             <a:ext cx="266700" cy="266700"/>
           </a:xfrm>
           <a:prstGeom prst="rect">
@@ -11532,14 +11384,14 @@
       </p:pic>
       <p:sp>
         <p:nvSpPr>
-          <p:cNvPr id="8" name="dw:steps.0.title"/>
+          <p:cNvPr id="7" name="dw:steps.0.title"/>
           <p:cNvSpPr/>
           <p:nvPr/>
         </p:nvSpPr>
         <p:spPr>
           <a:xfrm>
             <a:off x="685800" y="3101578"/>
-            <a:ext cx="2339626" cy="302121"/>
+            <a:ext cx="2426637" cy="302121"/>
           </a:xfrm>
           <a:prstGeom prst="rect">
             <a:avLst/>
@@ -11574,14 +11426,14 @@
       </p:sp>
       <p:sp>
         <p:nvSpPr>
-          <p:cNvPr id="9" name="dw:steps.0.desc"/>
+          <p:cNvPr id="8" name="dw:steps.0.desc"/>
           <p:cNvSpPr/>
           <p:nvPr/>
         </p:nvSpPr>
         <p:spPr>
           <a:xfrm>
             <a:off x="685800" y="3537049"/>
-            <a:ext cx="2339626" cy="946324"/>
+            <a:ext cx="2426637" cy="630882"/>
           </a:xfrm>
           <a:prstGeom prst="rect">
             <a:avLst/>
@@ -11614,9 +11466,68 @@
           </a:p>
         </p:txBody>
       </p:sp>
+      <p:sp>
+        <p:nvSpPr>
+          <p:cNvPr id="9" name="dw:_card.1"/>
+          <p:cNvSpPr/>
+          <p:nvPr/>
+        </p:nvSpPr>
+        <p:spPr>
+          <a:xfrm>
+            <a:off x="3457575" y="2358628"/>
+            <a:ext cx="2505075" cy="2478286"/>
+          </a:xfrm>
+          <a:prstGeom prst="rect">
+            <a:avLst/>
+          </a:prstGeom>
+          <a:ln/>
+        </p:spPr>
+      </p:sp>
+      <p:sp>
+        <p:nvSpPr>
+          <p:cNvPr id="10" name="dw:_n.1"/>
+          <p:cNvSpPr/>
+          <p:nvPr/>
+        </p:nvSpPr>
+        <p:spPr>
+          <a:xfrm>
+            <a:off x="3457575" y="2639244"/>
+            <a:ext cx="189959" cy="238869"/>
+          </a:xfrm>
+          <a:prstGeom prst="rect">
+            <a:avLst/>
+          </a:prstGeom>
+          <a:noFill/>
+          <a:ln/>
+        </p:spPr>
+        <p:txBody>
+          <a:bodyPr wrap="square" lIns="0" tIns="0" rIns="0" bIns="0" rtlCol="0" anchor="t"/>
+          <a:lstStyle/>
+          <a:p>
+            <a:pPr algn="l" indent="0" marL="0">
+              <a:lnSpc>
+                <a:spcPts val="1881"/>
+              </a:lnSpc>
+              <a:buNone/>
+            </a:pPr>
+            <a:r>
+              <a:rPr lang="de-DE" altLang="en-US" sz="1425" spc="-17" kern="0" dirty="0">
+                <a:solidFill>
+                  <a:srgbClr val="1F3A8A"/>
+                </a:solidFill>
+                <a:latin typeface="Source Serif 4" pitchFamily="34" charset="0"/>
+                <a:ea typeface="Source Serif 4" pitchFamily="34" charset="-122"/>
+                <a:cs typeface="Source Serif 4" pitchFamily="34" charset="-120"/>
+              </a:rPr>
+              <a:t>02</a:t>
+            </a:r>
+            <a:endParaRPr lang="de-DE" sz="1425" dirty="0"/>
+          </a:p>
+        </p:txBody>
+      </p:sp>
       <p:pic>
         <p:nvPicPr>
-          <p:cNvPr id="10" name="dw:_arrow.1" descr="preencoded.png">    </p:cNvPr>
+          <p:cNvPr id="11" name="dw:_icon.1" descr="preencoded.png">    </p:cNvPr>
           <p:cNvPicPr>
             <a:picLocks noChangeAspect="1"/>
           </p:cNvPicPr>
@@ -11630,107 +11541,7 @@
         </p:blipFill>
         <p:spPr>
           <a:xfrm>
-            <a:off x="3171825" y="3473946"/>
-            <a:ext cx="247650" cy="247650"/>
-          </a:xfrm>
-          <a:prstGeom prst="rect">
-            <a:avLst/>
-          </a:prstGeom>
-        </p:spPr>
-      </p:pic>
-      <p:sp>
-        <p:nvSpPr>
-          <p:cNvPr id="11" name="dw:_card.1"/>
-          <p:cNvSpPr/>
-          <p:nvPr/>
-        </p:nvSpPr>
-        <p:spPr>
-          <a:xfrm>
-            <a:off x="3486150" y="2358628"/>
-            <a:ext cx="2419350" cy="2478286"/>
-          </a:xfrm>
-          <a:prstGeom prst="rect">
-            <a:avLst/>
-          </a:prstGeom>
-          <a:ln/>
-        </p:spPr>
-      </p:sp>
-      <p:sp>
-        <p:nvSpPr>
-          <p:cNvPr id="12" name="dw:_badge.1"/>
-          <p:cNvSpPr/>
-          <p:nvPr/>
-        </p:nvSpPr>
-        <p:spPr>
-          <a:xfrm>
-            <a:off x="3486150" y="2668191"/>
-            <a:ext cx="95622" cy="180975"/>
-          </a:xfrm>
-          <a:prstGeom prst="ellipse">
-            <a:avLst/>
-          </a:prstGeom>
-          <a:ln/>
-        </p:spPr>
-      </p:sp>
-      <p:sp>
-        <p:nvSpPr>
-          <p:cNvPr id="13" name="dw:_n.1"/>
-          <p:cNvSpPr/>
-          <p:nvPr/>
-        </p:nvSpPr>
-        <p:spPr>
-          <a:xfrm>
-            <a:off x="3486150" y="2668191"/>
-            <a:ext cx="97056" cy="180975"/>
-          </a:xfrm>
-          <a:prstGeom prst="rect">
-            <a:avLst/>
-          </a:prstGeom>
-          <a:noFill/>
-          <a:ln/>
-        </p:spPr>
-        <p:txBody>
-          <a:bodyPr wrap="square" lIns="0" tIns="0" rIns="0" bIns="0" rtlCol="0" anchor="t"/>
-          <a:lstStyle/>
-          <a:p>
-            <a:pPr algn="l" indent="0" marL="0">
-              <a:lnSpc>
-                <a:spcPts val="1425"/>
-              </a:lnSpc>
-              <a:buNone/>
-            </a:pPr>
-            <a:r>
-              <a:rPr lang="de-DE" altLang="en-US" sz="1425" b="1" dirty="0">
-                <a:solidFill>
-                  <a:srgbClr val="1F3A8A"/>
-                </a:solidFill>
-                <a:latin typeface="Source Sans 3" pitchFamily="34" charset="0"/>
-                <a:ea typeface="Source Sans 3" pitchFamily="34" charset="-122"/>
-                <a:cs typeface="Source Sans 3" pitchFamily="34" charset="-120"/>
-              </a:rPr>
-              <a:t>2</a:t>
-            </a:r>
-            <a:endParaRPr lang="de-DE" sz="1425" dirty="0"/>
-          </a:p>
-        </p:txBody>
-      </p:sp>
-      <p:pic>
-        <p:nvPicPr>
-          <p:cNvPr id="14" name="dw:_icon.1" descr="preencoded.png">    </p:cNvPr>
-          <p:cNvPicPr>
-            <a:picLocks noChangeAspect="1"/>
-          </p:cNvPicPr>
-          <p:nvPr/>
-        </p:nvPicPr>
-        <p:blipFill>
-          <a:blip r:embed="rId4"/>
-          <a:stretch>
-            <a:fillRect/>
-          </a:stretch>
-        </p:blipFill>
-        <p:spPr>
-          <a:xfrm>
-            <a:off x="5524500" y="2625328"/>
+            <a:off x="5581650" y="2625328"/>
             <a:ext cx="266700" cy="266700"/>
           </a:xfrm>
           <a:prstGeom prst="rect">
@@ -11740,14 +11551,14 @@
       </p:pic>
       <p:sp>
         <p:nvSpPr>
-          <p:cNvPr id="15" name="dw:steps.1.title"/>
+          <p:cNvPr id="12" name="dw:steps.1.title"/>
           <p:cNvSpPr/>
           <p:nvPr/>
         </p:nvSpPr>
         <p:spPr>
           <a:xfrm>
-            <a:off x="3486150" y="3101578"/>
-            <a:ext cx="2339626" cy="302121"/>
+            <a:off x="3457575" y="3101578"/>
+            <a:ext cx="2426637" cy="302121"/>
           </a:xfrm>
           <a:prstGeom prst="rect">
             <a:avLst/>
@@ -11782,14 +11593,14 @@
       </p:sp>
       <p:sp>
         <p:nvSpPr>
-          <p:cNvPr id="16" name="dw:steps.1.desc"/>
+          <p:cNvPr id="13" name="dw:steps.1.desc"/>
           <p:cNvSpPr/>
           <p:nvPr/>
         </p:nvSpPr>
         <p:spPr>
           <a:xfrm>
-            <a:off x="3486150" y="3537049"/>
-            <a:ext cx="2339626" cy="946324"/>
+            <a:off x="3457575" y="3537049"/>
+            <a:ext cx="2426637" cy="946324"/>
           </a:xfrm>
           <a:prstGeom prst="rect">
             <a:avLst/>
@@ -11822,40 +11633,16 @@
           </a:p>
         </p:txBody>
       </p:sp>
-      <p:pic>
-        <p:nvPicPr>
-          <p:cNvPr id="17" name="dw:_arrow.2" descr="preencoded.png">    </p:cNvPr>
-          <p:cNvPicPr>
-            <a:picLocks noChangeAspect="1"/>
-          </p:cNvPicPr>
+      <p:sp>
+        <p:nvSpPr>
+          <p:cNvPr id="14" name="dw:_card.2"/>
+          <p:cNvSpPr/>
           <p:nvPr/>
-        </p:nvPicPr>
-        <p:blipFill>
-          <a:blip r:embed="rId5"/>
-          <a:stretch>
-            <a:fillRect/>
-          </a:stretch>
-        </p:blipFill>
+        </p:nvSpPr>
         <p:spPr>
           <a:xfrm>
-            <a:off x="5972175" y="3473946"/>
-            <a:ext cx="247650" cy="247650"/>
-          </a:xfrm>
-          <a:prstGeom prst="rect">
-            <a:avLst/>
-          </a:prstGeom>
-        </p:spPr>
-      </p:pic>
-      <p:sp>
-        <p:nvSpPr>
-          <p:cNvPr id="18" name="dw:_card.2"/>
-          <p:cNvSpPr/>
-          <p:nvPr/>
-        </p:nvSpPr>
-        <p:spPr>
-          <a:xfrm>
-            <a:off x="6286500" y="2358628"/>
-            <a:ext cx="2419350" cy="2478286"/>
+            <a:off x="6229350" y="2358628"/>
+            <a:ext cx="2505075" cy="2478286"/>
           </a:xfrm>
           <a:prstGeom prst="rect">
             <a:avLst/>
@@ -11865,31 +11652,14 @@
       </p:sp>
       <p:sp>
         <p:nvSpPr>
-          <p:cNvPr id="19" name="dw:_badge.2"/>
+          <p:cNvPr id="15" name="dw:_n.2"/>
           <p:cNvSpPr/>
           <p:nvPr/>
         </p:nvSpPr>
         <p:spPr>
           <a:xfrm>
-            <a:off x="6286500" y="2668191"/>
-            <a:ext cx="95622" cy="180975"/>
-          </a:xfrm>
-          <a:prstGeom prst="ellipse">
-            <a:avLst/>
-          </a:prstGeom>
-          <a:ln/>
-        </p:spPr>
-      </p:sp>
-      <p:sp>
-        <p:nvSpPr>
-          <p:cNvPr id="20" name="dw:_n.2"/>
-          <p:cNvSpPr/>
-          <p:nvPr/>
-        </p:nvSpPr>
-        <p:spPr>
-          <a:xfrm>
-            <a:off x="6286500" y="2668191"/>
-            <a:ext cx="97056" cy="180975"/>
+            <a:off x="6229350" y="2639244"/>
+            <a:ext cx="189959" cy="238869"/>
           </a:xfrm>
           <a:prstGeom prst="rect">
             <a:avLst/>
@@ -11903,20 +11673,20 @@
           <a:p>
             <a:pPr algn="l" indent="0" marL="0">
               <a:lnSpc>
-                <a:spcPts val="1425"/>
+                <a:spcPts val="1881"/>
               </a:lnSpc>
               <a:buNone/>
             </a:pPr>
             <a:r>
-              <a:rPr lang="de-DE" altLang="en-US" sz="1425" b="1" dirty="0">
+              <a:rPr lang="de-DE" altLang="en-US" sz="1425" spc="-17" kern="0" dirty="0">
                 <a:solidFill>
                   <a:srgbClr val="1F3A8A"/>
                 </a:solidFill>
-                <a:latin typeface="Source Sans 3" pitchFamily="34" charset="0"/>
-                <a:ea typeface="Source Sans 3" pitchFamily="34" charset="-122"/>
-                <a:cs typeface="Source Sans 3" pitchFamily="34" charset="-120"/>
+                <a:latin typeface="Source Serif 4" pitchFamily="34" charset="0"/>
+                <a:ea typeface="Source Serif 4" pitchFamily="34" charset="-122"/>
+                <a:cs typeface="Source Serif 4" pitchFamily="34" charset="-120"/>
               </a:rPr>
-              <a:t>3</a:t>
+              <a:t>03</a:t>
             </a:r>
             <a:endParaRPr lang="de-DE" sz="1425" dirty="0"/>
           </a:p>
@@ -11924,21 +11694,21 @@
       </p:sp>
       <p:pic>
         <p:nvPicPr>
-          <p:cNvPr id="21" name="dw:_icon.2" descr="preencoded.png">    </p:cNvPr>
+          <p:cNvPr id="16" name="dw:_icon.2" descr="preencoded.png">    </p:cNvPr>
           <p:cNvPicPr>
             <a:picLocks noChangeAspect="1"/>
           </p:cNvPicPr>
           <p:nvPr/>
         </p:nvPicPr>
         <p:blipFill>
-          <a:blip r:embed="rId6"/>
+          <a:blip r:embed="rId4"/>
           <a:stretch>
             <a:fillRect/>
           </a:stretch>
         </p:blipFill>
         <p:spPr>
           <a:xfrm>
-            <a:off x="8324850" y="2625328"/>
+            <a:off x="8353425" y="2625328"/>
             <a:ext cx="266700" cy="266700"/>
           </a:xfrm>
           <a:prstGeom prst="rect">
@@ -11948,14 +11718,14 @@
       </p:pic>
       <p:sp>
         <p:nvSpPr>
-          <p:cNvPr id="22" name="dw:steps.2.title"/>
+          <p:cNvPr id="17" name="dw:steps.2.title"/>
           <p:cNvSpPr/>
           <p:nvPr/>
         </p:nvSpPr>
         <p:spPr>
           <a:xfrm>
-            <a:off x="6286500" y="3101578"/>
-            <a:ext cx="2339626" cy="302121"/>
+            <a:off x="6229350" y="3101578"/>
+            <a:ext cx="2426637" cy="302121"/>
           </a:xfrm>
           <a:prstGeom prst="rect">
             <a:avLst/>
@@ -11990,14 +11760,14 @@
       </p:sp>
       <p:sp>
         <p:nvSpPr>
-          <p:cNvPr id="23" name="dw:steps.2.desc"/>
+          <p:cNvPr id="18" name="dw:steps.2.desc"/>
           <p:cNvSpPr/>
           <p:nvPr/>
         </p:nvSpPr>
         <p:spPr>
           <a:xfrm>
-            <a:off x="6286500" y="3537049"/>
-            <a:ext cx="2339626" cy="1261765"/>
+            <a:off x="6229350" y="3537049"/>
+            <a:ext cx="2426637" cy="1261765"/>
           </a:xfrm>
           <a:prstGeom prst="rect">
             <a:avLst/>
@@ -12030,40 +11800,16 @@
           </a:p>
         </p:txBody>
       </p:sp>
-      <p:pic>
-        <p:nvPicPr>
-          <p:cNvPr id="24" name="dw:_arrow.3" descr="preencoded.png">    </p:cNvPr>
-          <p:cNvPicPr>
-            <a:picLocks noChangeAspect="1"/>
-          </p:cNvPicPr>
+      <p:sp>
+        <p:nvSpPr>
+          <p:cNvPr id="19" name="dw:_card.3"/>
+          <p:cNvSpPr/>
           <p:nvPr/>
-        </p:nvPicPr>
-        <p:blipFill>
-          <a:blip r:embed="rId7"/>
-          <a:stretch>
-            <a:fillRect/>
-          </a:stretch>
-        </p:blipFill>
+        </p:nvSpPr>
         <p:spPr>
           <a:xfrm>
-            <a:off x="8772525" y="3473946"/>
-            <a:ext cx="247650" cy="247650"/>
-          </a:xfrm>
-          <a:prstGeom prst="rect">
-            <a:avLst/>
-          </a:prstGeom>
-        </p:spPr>
-      </p:pic>
-      <p:sp>
-        <p:nvSpPr>
-          <p:cNvPr id="25" name="dw:_card.3"/>
-          <p:cNvSpPr/>
-          <p:nvPr/>
-        </p:nvSpPr>
-        <p:spPr>
-          <a:xfrm>
-            <a:off x="9086850" y="2358628"/>
-            <a:ext cx="2419350" cy="2478286"/>
+            <a:off x="9001125" y="2358628"/>
+            <a:ext cx="2505075" cy="2478286"/>
           </a:xfrm>
           <a:prstGeom prst="rect">
             <a:avLst/>
@@ -12073,31 +11819,14 @@
       </p:sp>
       <p:sp>
         <p:nvSpPr>
-          <p:cNvPr id="26" name="dw:_badge.3"/>
+          <p:cNvPr id="20" name="dw:_n.3"/>
           <p:cNvSpPr/>
           <p:nvPr/>
         </p:nvSpPr>
         <p:spPr>
           <a:xfrm>
-            <a:off x="9086850" y="2668191"/>
-            <a:ext cx="95622" cy="180975"/>
-          </a:xfrm>
-          <a:prstGeom prst="ellipse">
-            <a:avLst/>
-          </a:prstGeom>
-          <a:ln/>
-        </p:spPr>
-      </p:sp>
-      <p:sp>
-        <p:nvSpPr>
-          <p:cNvPr id="27" name="dw:_n.3"/>
-          <p:cNvSpPr/>
-          <p:nvPr/>
-        </p:nvSpPr>
-        <p:spPr>
-          <a:xfrm>
-            <a:off x="9086850" y="2668191"/>
-            <a:ext cx="97056" cy="180975"/>
+            <a:off x="9001125" y="2639244"/>
+            <a:ext cx="189959" cy="238869"/>
           </a:xfrm>
           <a:prstGeom prst="rect">
             <a:avLst/>
@@ -12111,20 +11840,20 @@
           <a:p>
             <a:pPr algn="l" indent="0" marL="0">
               <a:lnSpc>
-                <a:spcPts val="1425"/>
+                <a:spcPts val="1881"/>
               </a:lnSpc>
               <a:buNone/>
             </a:pPr>
             <a:r>
-              <a:rPr lang="de-DE" altLang="en-US" sz="1425" b="1" dirty="0">
+              <a:rPr lang="de-DE" altLang="en-US" sz="1425" spc="-17" kern="0" dirty="0">
                 <a:solidFill>
                   <a:srgbClr val="1F3A8A"/>
                 </a:solidFill>
-                <a:latin typeface="Source Sans 3" pitchFamily="34" charset="0"/>
-                <a:ea typeface="Source Sans 3" pitchFamily="34" charset="-122"/>
-                <a:cs typeface="Source Sans 3" pitchFamily="34" charset="-120"/>
+                <a:latin typeface="Source Serif 4" pitchFamily="34" charset="0"/>
+                <a:ea typeface="Source Serif 4" pitchFamily="34" charset="-122"/>
+                <a:cs typeface="Source Serif 4" pitchFamily="34" charset="-120"/>
               </a:rPr>
-              <a:t>4</a:t>
+              <a:t>04</a:t>
             </a:r>
             <a:endParaRPr lang="de-DE" sz="1425" dirty="0"/>
           </a:p>
@@ -12132,14 +11861,14 @@
       </p:sp>
       <p:pic>
         <p:nvPicPr>
-          <p:cNvPr id="28" name="dw:_icon.3" descr="preencoded.png">    </p:cNvPr>
+          <p:cNvPr id="21" name="dw:_icon.3" descr="preencoded.png">    </p:cNvPr>
           <p:cNvPicPr>
             <a:picLocks noChangeAspect="1"/>
           </p:cNvPicPr>
           <p:nvPr/>
         </p:nvPicPr>
         <p:blipFill>
-          <a:blip r:embed="rId8"/>
+          <a:blip r:embed="rId5"/>
           <a:stretch>
             <a:fillRect/>
           </a:stretch>
@@ -12156,14 +11885,14 @@
       </p:pic>
       <p:sp>
         <p:nvSpPr>
-          <p:cNvPr id="29" name="dw:steps.3.title"/>
+          <p:cNvPr id="22" name="dw:steps.3.title"/>
           <p:cNvSpPr/>
           <p:nvPr/>
         </p:nvSpPr>
         <p:spPr>
           <a:xfrm>
-            <a:off x="9086850" y="3101578"/>
-            <a:ext cx="2339626" cy="302121"/>
+            <a:off x="9001125" y="3101578"/>
+            <a:ext cx="2426637" cy="302121"/>
           </a:xfrm>
           <a:prstGeom prst="rect">
             <a:avLst/>
@@ -12198,14 +11927,14 @@
       </p:sp>
       <p:sp>
         <p:nvSpPr>
-          <p:cNvPr id="30" name="dw:steps.3.desc"/>
+          <p:cNvPr id="23" name="dw:steps.3.desc"/>
           <p:cNvSpPr/>
           <p:nvPr/>
         </p:nvSpPr>
         <p:spPr>
           <a:xfrm>
-            <a:off x="9086850" y="3537049"/>
-            <a:ext cx="2339626" cy="946324"/>
+            <a:off x="9001125" y="3537049"/>
+            <a:ext cx="2426637" cy="946324"/>
           </a:xfrm>
           <a:prstGeom prst="rect">
             <a:avLst/>
@@ -12240,14 +11969,14 @@
       </p:sp>
       <p:sp>
         <p:nvSpPr>
-          <p:cNvPr id="31" name="dw:_footer.title"/>
+          <p:cNvPr id="24" name="dw:_footer.title"/>
           <p:cNvSpPr/>
           <p:nvPr/>
         </p:nvSpPr>
         <p:spPr>
           <a:xfrm>
             <a:off x="685800" y="6450360"/>
-            <a:ext cx="777358" cy="148530"/>
+            <a:ext cx="706661" cy="148530"/>
           </a:xfrm>
           <a:prstGeom prst="rect">
             <a:avLst/>
@@ -12274,7 +12003,7 @@
                 <a:ea typeface="Source Sans 3" pitchFamily="34" charset="-122"/>
                 <a:cs typeface="Source Sans 3" pitchFamily="34" charset="-120"/>
               </a:rPr>
-              <a:t>Strategie 2027</a:t>
+              <a:t>Weg bis 2027</a:t>
             </a:r>
             <a:endParaRPr lang="de-DE" sz="975" dirty="0"/>
           </a:p>
@@ -12282,14 +12011,14 @@
       </p:sp>
       <p:sp>
         <p:nvSpPr>
-          <p:cNvPr id="32" name="dw:_footer.page"/>
+          <p:cNvPr id="25" name="dw:_footer.page"/>
           <p:cNvSpPr/>
           <p:nvPr/>
         </p:nvSpPr>
         <p:spPr>
           <a:xfrm>
-            <a:off x="11442129" y="6450360"/>
-            <a:ext cx="65032" cy="148530"/>
+            <a:off x="11213827" y="6450360"/>
+            <a:ext cx="296758" cy="148530"/>
           </a:xfrm>
           <a:prstGeom prst="rect">
             <a:avLst/>
@@ -12316,7 +12045,7 @@
                 <a:ea typeface="Source Sans 3" pitchFamily="34" charset="-122"/>
                 <a:cs typeface="Source Sans 3" pitchFamily="34" charset="-120"/>
               </a:rPr>
-              <a:t>9</a:t>
+              <a:t>9 / 12</a:t>
             </a:r>
             <a:endParaRPr lang="de-DE" sz="975" dirty="0"/>
           </a:p>
@@ -12516,7 +12245,7 @@
                                 </p:cTn>
                               </p:par>
                               <p:par>
-                                <p:cTn id="15" presetID="42" presetClass="entr" presetSubtype="0" fill="hold" grpId="0" nodeType="withEffect">
+                                <p:cTn id="15" presetID="42" presetClass="entr" presetSubtype="0" fill="hold" nodeType="withEffect">
                                   <p:stCondLst>
                                     <p:cond delay="0"/>
                                   </p:stCondLst>
@@ -12597,7 +12326,7 @@
                                 </p:cTn>
                               </p:par>
                               <p:par>
-                                <p:cTn id="20" presetID="42" presetClass="entr" presetSubtype="0" fill="hold" nodeType="withEffect">
+                                <p:cTn id="20" presetID="42" presetClass="entr" presetSubtype="0" fill="hold" grpId="0" nodeType="withEffect">
                                   <p:stCondLst>
                                     <p:cond delay="0"/>
                                   </p:stCondLst>
@@ -12761,7 +12490,7 @@
                               <p:par>
                                 <p:cTn id="30" presetID="42" presetClass="entr" presetSubtype="0" fill="hold" grpId="0" nodeType="withEffect">
                                   <p:stCondLst>
-                                    <p:cond delay="0"/>
+                                    <p:cond delay="150"/>
                                   </p:stCondLst>
                                   <p:childTnLst>
                                     <p:set>
@@ -12840,7 +12569,7 @@
                                 </p:cTn>
                               </p:par>
                               <p:par>
-                                <p:cTn id="35" presetID="42" presetClass="entr" presetSubtype="0" fill="hold" nodeType="withEffect">
+                                <p:cTn id="35" presetID="42" presetClass="entr" presetSubtype="0" fill="hold" grpId="0" nodeType="withEffect">
                                   <p:stCondLst>
                                     <p:cond delay="150"/>
                                   </p:stCondLst>
@@ -12921,7 +12650,7 @@
                                 </p:cTn>
                               </p:par>
                               <p:par>
-                                <p:cTn id="40" presetID="42" presetClass="entr" presetSubtype="0" fill="hold" grpId="0" nodeType="withEffect">
+                                <p:cTn id="40" presetID="42" presetClass="entr" presetSubtype="0" fill="hold" nodeType="withEffect">
                                   <p:stCondLst>
                                     <p:cond delay="150"/>
                                   </p:stCondLst>
@@ -13164,9 +12893,9 @@
                                 </p:cTn>
                               </p:par>
                               <p:par>
-                                <p:cTn id="55" presetID="42" presetClass="entr" presetSubtype="0" fill="hold" nodeType="withEffect">
+                                <p:cTn id="55" presetID="42" presetClass="entr" presetSubtype="0" fill="hold" grpId="0" nodeType="withEffect">
                                   <p:stCondLst>
-                                    <p:cond delay="150"/>
+                                    <p:cond delay="300"/>
                                   </p:stCondLst>
                                   <p:childTnLst>
                                     <p:set>
@@ -13247,7 +12976,7 @@
                               <p:par>
                                 <p:cTn id="60" presetID="42" presetClass="entr" presetSubtype="0" fill="hold" grpId="0" nodeType="withEffect">
                                   <p:stCondLst>
-                                    <p:cond delay="150"/>
+                                    <p:cond delay="300"/>
                                   </p:stCondLst>
                                   <p:childTnLst>
                                     <p:set>
@@ -13326,9 +13055,9 @@
                                 </p:cTn>
                               </p:par>
                               <p:par>
-                                <p:cTn id="65" presetID="42" presetClass="entr" presetSubtype="0" fill="hold" grpId="0" nodeType="withEffect">
+                                <p:cTn id="65" presetID="42" presetClass="entr" presetSubtype="0" fill="hold" nodeType="withEffect">
                                   <p:stCondLst>
-                                    <p:cond delay="150"/>
+                                    <p:cond delay="300"/>
                                   </p:stCondLst>
                                   <p:childTnLst>
                                     <p:set>
@@ -13407,7 +13136,7 @@
                                 </p:cTn>
                               </p:par>
                               <p:par>
-                                <p:cTn id="70" presetID="42" presetClass="entr" presetSubtype="0" fill="hold" nodeType="withEffect">
+                                <p:cTn id="70" presetID="42" presetClass="entr" presetSubtype="0" fill="hold" grpId="0" nodeType="withEffect">
                                   <p:stCondLst>
                                     <p:cond delay="300"/>
                                   </p:stCondLst>
@@ -13571,7 +13300,7 @@
                               <p:par>
                                 <p:cTn id="80" presetID="42" presetClass="entr" presetSubtype="0" fill="hold" grpId="0" nodeType="withEffect">
                                   <p:stCondLst>
-                                    <p:cond delay="300"/>
+                                    <p:cond delay="450"/>
                                   </p:stCondLst>
                                   <p:childTnLst>
                                     <p:set>
@@ -13652,7 +13381,7 @@
                               <p:par>
                                 <p:cTn id="85" presetID="42" presetClass="entr" presetSubtype="0" fill="hold" grpId="0" nodeType="withEffect">
                                   <p:stCondLst>
-                                    <p:cond delay="300"/>
+                                    <p:cond delay="450"/>
                                   </p:stCondLst>
                                   <p:childTnLst>
                                     <p:set>
@@ -13733,7 +13462,7 @@
                               <p:par>
                                 <p:cTn id="90" presetID="42" presetClass="entr" presetSubtype="0" fill="hold" nodeType="withEffect">
                                   <p:stCondLst>
-                                    <p:cond delay="300"/>
+                                    <p:cond delay="450"/>
                                   </p:stCondLst>
                                   <p:childTnLst>
                                     <p:set>
@@ -13814,7 +13543,7 @@
                               <p:par>
                                 <p:cTn id="95" presetID="42" presetClass="entr" presetSubtype="0" fill="hold" grpId="0" nodeType="withEffect">
                                   <p:stCondLst>
-                                    <p:cond delay="300"/>
+                                    <p:cond delay="450"/>
                                   </p:stCondLst>
                                   <p:childTnLst>
                                     <p:set>
@@ -13895,7 +13624,7 @@
                               <p:par>
                                 <p:cTn id="100" presetID="42" presetClass="entr" presetSubtype="0" fill="hold" grpId="0" nodeType="withEffect">
                                   <p:stCondLst>
-                                    <p:cond delay="300"/>
+                                    <p:cond delay="450"/>
                                   </p:stCondLst>
                                   <p:childTnLst>
                                     <p:set>
@@ -13952,573 +13681,6 @@
                                         <p:cTn id="104" dur="450" fill="hold"/>
                                         <p:tgtEl>
                                           <p:spTgt spid="23"/>
-                                        </p:tgtEl>
-                                        <p:attrNameLst>
-                                          <p:attrName>ppt_y</p:attrName>
-                                        </p:attrNameLst>
-                                      </p:cBhvr>
-                                      <p:tavLst>
-                                        <p:tav tm="0">
-                                          <p:val>
-                                            <p:strVal val="#ppt_y+.1"/>
-                                          </p:val>
-                                        </p:tav>
-                                        <p:tav tm="100000">
-                                          <p:val>
-                                            <p:strVal val="#ppt_y"/>
-                                          </p:val>
-                                        </p:tav>
-                                      </p:tavLst>
-                                    </p:anim>
-                                  </p:childTnLst>
-                                </p:cTn>
-                              </p:par>
-                              <p:par>
-                                <p:cTn id="105" presetID="42" presetClass="entr" presetSubtype="0" fill="hold" nodeType="withEffect">
-                                  <p:stCondLst>
-                                    <p:cond delay="450"/>
-                                  </p:stCondLst>
-                                  <p:childTnLst>
-                                    <p:set>
-                                      <p:cBhvr>
-                                        <p:cTn id="106" dur="1" fill="hold">
-                                          <p:stCondLst>
-                                            <p:cond delay="0"/>
-                                          </p:stCondLst>
-                                        </p:cTn>
-                                        <p:tgtEl>
-                                          <p:spTgt spid="24"/>
-                                        </p:tgtEl>
-                                        <p:attrNameLst>
-                                          <p:attrName>style.visibility</p:attrName>
-                                        </p:attrNameLst>
-                                      </p:cBhvr>
-                                      <p:to>
-                                        <p:strVal val="visible"/>
-                                      </p:to>
-                                    </p:set>
-                                    <p:animEffect transition="in" filter="fade">
-                                      <p:cBhvr>
-                                        <p:cTn id="107" dur="450"/>
-                                        <p:tgtEl>
-                                          <p:spTgt spid="24"/>
-                                        </p:tgtEl>
-                                      </p:cBhvr>
-                                    </p:animEffect>
-                                    <p:anim calcmode="lin" valueType="num">
-                                      <p:cBhvr>
-                                        <p:cTn id="108" dur="450" fill="hold"/>
-                                        <p:tgtEl>
-                                          <p:spTgt spid="24"/>
-                                        </p:tgtEl>
-                                        <p:attrNameLst>
-                                          <p:attrName>ppt_x</p:attrName>
-                                        </p:attrNameLst>
-                                      </p:cBhvr>
-                                      <p:tavLst>
-                                        <p:tav tm="0">
-                                          <p:val>
-                                            <p:strVal val="#ppt_x"/>
-                                          </p:val>
-                                        </p:tav>
-                                        <p:tav tm="100000">
-                                          <p:val>
-                                            <p:strVal val="#ppt_x"/>
-                                          </p:val>
-                                        </p:tav>
-                                      </p:tavLst>
-                                    </p:anim>
-                                    <p:anim calcmode="lin" valueType="num">
-                                      <p:cBhvr>
-                                        <p:cTn id="109" dur="450" fill="hold"/>
-                                        <p:tgtEl>
-                                          <p:spTgt spid="24"/>
-                                        </p:tgtEl>
-                                        <p:attrNameLst>
-                                          <p:attrName>ppt_y</p:attrName>
-                                        </p:attrNameLst>
-                                      </p:cBhvr>
-                                      <p:tavLst>
-                                        <p:tav tm="0">
-                                          <p:val>
-                                            <p:strVal val="#ppt_y+.1"/>
-                                          </p:val>
-                                        </p:tav>
-                                        <p:tav tm="100000">
-                                          <p:val>
-                                            <p:strVal val="#ppt_y"/>
-                                          </p:val>
-                                        </p:tav>
-                                      </p:tavLst>
-                                    </p:anim>
-                                  </p:childTnLst>
-                                </p:cTn>
-                              </p:par>
-                              <p:par>
-                                <p:cTn id="110" presetID="42" presetClass="entr" presetSubtype="0" fill="hold" grpId="0" nodeType="withEffect">
-                                  <p:stCondLst>
-                                    <p:cond delay="450"/>
-                                  </p:stCondLst>
-                                  <p:childTnLst>
-                                    <p:set>
-                                      <p:cBhvr>
-                                        <p:cTn id="111" dur="1" fill="hold">
-                                          <p:stCondLst>
-                                            <p:cond delay="0"/>
-                                          </p:stCondLst>
-                                        </p:cTn>
-                                        <p:tgtEl>
-                                          <p:spTgt spid="25"/>
-                                        </p:tgtEl>
-                                        <p:attrNameLst>
-                                          <p:attrName>style.visibility</p:attrName>
-                                        </p:attrNameLst>
-                                      </p:cBhvr>
-                                      <p:to>
-                                        <p:strVal val="visible"/>
-                                      </p:to>
-                                    </p:set>
-                                    <p:animEffect transition="in" filter="fade">
-                                      <p:cBhvr>
-                                        <p:cTn id="112" dur="450"/>
-                                        <p:tgtEl>
-                                          <p:spTgt spid="25"/>
-                                        </p:tgtEl>
-                                      </p:cBhvr>
-                                    </p:animEffect>
-                                    <p:anim calcmode="lin" valueType="num">
-                                      <p:cBhvr>
-                                        <p:cTn id="113" dur="450" fill="hold"/>
-                                        <p:tgtEl>
-                                          <p:spTgt spid="25"/>
-                                        </p:tgtEl>
-                                        <p:attrNameLst>
-                                          <p:attrName>ppt_x</p:attrName>
-                                        </p:attrNameLst>
-                                      </p:cBhvr>
-                                      <p:tavLst>
-                                        <p:tav tm="0">
-                                          <p:val>
-                                            <p:strVal val="#ppt_x"/>
-                                          </p:val>
-                                        </p:tav>
-                                        <p:tav tm="100000">
-                                          <p:val>
-                                            <p:strVal val="#ppt_x"/>
-                                          </p:val>
-                                        </p:tav>
-                                      </p:tavLst>
-                                    </p:anim>
-                                    <p:anim calcmode="lin" valueType="num">
-                                      <p:cBhvr>
-                                        <p:cTn id="114" dur="450" fill="hold"/>
-                                        <p:tgtEl>
-                                          <p:spTgt spid="25"/>
-                                        </p:tgtEl>
-                                        <p:attrNameLst>
-                                          <p:attrName>ppt_y</p:attrName>
-                                        </p:attrNameLst>
-                                      </p:cBhvr>
-                                      <p:tavLst>
-                                        <p:tav tm="0">
-                                          <p:val>
-                                            <p:strVal val="#ppt_y+.1"/>
-                                          </p:val>
-                                        </p:tav>
-                                        <p:tav tm="100000">
-                                          <p:val>
-                                            <p:strVal val="#ppt_y"/>
-                                          </p:val>
-                                        </p:tav>
-                                      </p:tavLst>
-                                    </p:anim>
-                                  </p:childTnLst>
-                                </p:cTn>
-                              </p:par>
-                              <p:par>
-                                <p:cTn id="115" presetID="42" presetClass="entr" presetSubtype="0" fill="hold" grpId="0" nodeType="withEffect">
-                                  <p:stCondLst>
-                                    <p:cond delay="450"/>
-                                  </p:stCondLst>
-                                  <p:childTnLst>
-                                    <p:set>
-                                      <p:cBhvr>
-                                        <p:cTn id="116" dur="1" fill="hold">
-                                          <p:stCondLst>
-                                            <p:cond delay="0"/>
-                                          </p:stCondLst>
-                                        </p:cTn>
-                                        <p:tgtEl>
-                                          <p:spTgt spid="26"/>
-                                        </p:tgtEl>
-                                        <p:attrNameLst>
-                                          <p:attrName>style.visibility</p:attrName>
-                                        </p:attrNameLst>
-                                      </p:cBhvr>
-                                      <p:to>
-                                        <p:strVal val="visible"/>
-                                      </p:to>
-                                    </p:set>
-                                    <p:animEffect transition="in" filter="fade">
-                                      <p:cBhvr>
-                                        <p:cTn id="117" dur="450"/>
-                                        <p:tgtEl>
-                                          <p:spTgt spid="26"/>
-                                        </p:tgtEl>
-                                      </p:cBhvr>
-                                    </p:animEffect>
-                                    <p:anim calcmode="lin" valueType="num">
-                                      <p:cBhvr>
-                                        <p:cTn id="118" dur="450" fill="hold"/>
-                                        <p:tgtEl>
-                                          <p:spTgt spid="26"/>
-                                        </p:tgtEl>
-                                        <p:attrNameLst>
-                                          <p:attrName>ppt_x</p:attrName>
-                                        </p:attrNameLst>
-                                      </p:cBhvr>
-                                      <p:tavLst>
-                                        <p:tav tm="0">
-                                          <p:val>
-                                            <p:strVal val="#ppt_x"/>
-                                          </p:val>
-                                        </p:tav>
-                                        <p:tav tm="100000">
-                                          <p:val>
-                                            <p:strVal val="#ppt_x"/>
-                                          </p:val>
-                                        </p:tav>
-                                      </p:tavLst>
-                                    </p:anim>
-                                    <p:anim calcmode="lin" valueType="num">
-                                      <p:cBhvr>
-                                        <p:cTn id="119" dur="450" fill="hold"/>
-                                        <p:tgtEl>
-                                          <p:spTgt spid="26"/>
-                                        </p:tgtEl>
-                                        <p:attrNameLst>
-                                          <p:attrName>ppt_y</p:attrName>
-                                        </p:attrNameLst>
-                                      </p:cBhvr>
-                                      <p:tavLst>
-                                        <p:tav tm="0">
-                                          <p:val>
-                                            <p:strVal val="#ppt_y+.1"/>
-                                          </p:val>
-                                        </p:tav>
-                                        <p:tav tm="100000">
-                                          <p:val>
-                                            <p:strVal val="#ppt_y"/>
-                                          </p:val>
-                                        </p:tav>
-                                      </p:tavLst>
-                                    </p:anim>
-                                  </p:childTnLst>
-                                </p:cTn>
-                              </p:par>
-                              <p:par>
-                                <p:cTn id="120" presetID="42" presetClass="entr" presetSubtype="0" fill="hold" grpId="0" nodeType="withEffect">
-                                  <p:stCondLst>
-                                    <p:cond delay="450"/>
-                                  </p:stCondLst>
-                                  <p:childTnLst>
-                                    <p:set>
-                                      <p:cBhvr>
-                                        <p:cTn id="121" dur="1" fill="hold">
-                                          <p:stCondLst>
-                                            <p:cond delay="0"/>
-                                          </p:stCondLst>
-                                        </p:cTn>
-                                        <p:tgtEl>
-                                          <p:spTgt spid="27"/>
-                                        </p:tgtEl>
-                                        <p:attrNameLst>
-                                          <p:attrName>style.visibility</p:attrName>
-                                        </p:attrNameLst>
-                                      </p:cBhvr>
-                                      <p:to>
-                                        <p:strVal val="visible"/>
-                                      </p:to>
-                                    </p:set>
-                                    <p:animEffect transition="in" filter="fade">
-                                      <p:cBhvr>
-                                        <p:cTn id="122" dur="450"/>
-                                        <p:tgtEl>
-                                          <p:spTgt spid="27"/>
-                                        </p:tgtEl>
-                                      </p:cBhvr>
-                                    </p:animEffect>
-                                    <p:anim calcmode="lin" valueType="num">
-                                      <p:cBhvr>
-                                        <p:cTn id="123" dur="450" fill="hold"/>
-                                        <p:tgtEl>
-                                          <p:spTgt spid="27"/>
-                                        </p:tgtEl>
-                                        <p:attrNameLst>
-                                          <p:attrName>ppt_x</p:attrName>
-                                        </p:attrNameLst>
-                                      </p:cBhvr>
-                                      <p:tavLst>
-                                        <p:tav tm="0">
-                                          <p:val>
-                                            <p:strVal val="#ppt_x"/>
-                                          </p:val>
-                                        </p:tav>
-                                        <p:tav tm="100000">
-                                          <p:val>
-                                            <p:strVal val="#ppt_x"/>
-                                          </p:val>
-                                        </p:tav>
-                                      </p:tavLst>
-                                    </p:anim>
-                                    <p:anim calcmode="lin" valueType="num">
-                                      <p:cBhvr>
-                                        <p:cTn id="124" dur="450" fill="hold"/>
-                                        <p:tgtEl>
-                                          <p:spTgt spid="27"/>
-                                        </p:tgtEl>
-                                        <p:attrNameLst>
-                                          <p:attrName>ppt_y</p:attrName>
-                                        </p:attrNameLst>
-                                      </p:cBhvr>
-                                      <p:tavLst>
-                                        <p:tav tm="0">
-                                          <p:val>
-                                            <p:strVal val="#ppt_y+.1"/>
-                                          </p:val>
-                                        </p:tav>
-                                        <p:tav tm="100000">
-                                          <p:val>
-                                            <p:strVal val="#ppt_y"/>
-                                          </p:val>
-                                        </p:tav>
-                                      </p:tavLst>
-                                    </p:anim>
-                                  </p:childTnLst>
-                                </p:cTn>
-                              </p:par>
-                              <p:par>
-                                <p:cTn id="125" presetID="42" presetClass="entr" presetSubtype="0" fill="hold" nodeType="withEffect">
-                                  <p:stCondLst>
-                                    <p:cond delay="450"/>
-                                  </p:stCondLst>
-                                  <p:childTnLst>
-                                    <p:set>
-                                      <p:cBhvr>
-                                        <p:cTn id="126" dur="1" fill="hold">
-                                          <p:stCondLst>
-                                            <p:cond delay="0"/>
-                                          </p:stCondLst>
-                                        </p:cTn>
-                                        <p:tgtEl>
-                                          <p:spTgt spid="28"/>
-                                        </p:tgtEl>
-                                        <p:attrNameLst>
-                                          <p:attrName>style.visibility</p:attrName>
-                                        </p:attrNameLst>
-                                      </p:cBhvr>
-                                      <p:to>
-                                        <p:strVal val="visible"/>
-                                      </p:to>
-                                    </p:set>
-                                    <p:animEffect transition="in" filter="fade">
-                                      <p:cBhvr>
-                                        <p:cTn id="127" dur="450"/>
-                                        <p:tgtEl>
-                                          <p:spTgt spid="28"/>
-                                        </p:tgtEl>
-                                      </p:cBhvr>
-                                    </p:animEffect>
-                                    <p:anim calcmode="lin" valueType="num">
-                                      <p:cBhvr>
-                                        <p:cTn id="128" dur="450" fill="hold"/>
-                                        <p:tgtEl>
-                                          <p:spTgt spid="28"/>
-                                        </p:tgtEl>
-                                        <p:attrNameLst>
-                                          <p:attrName>ppt_x</p:attrName>
-                                        </p:attrNameLst>
-                                      </p:cBhvr>
-                                      <p:tavLst>
-                                        <p:tav tm="0">
-                                          <p:val>
-                                            <p:strVal val="#ppt_x"/>
-                                          </p:val>
-                                        </p:tav>
-                                        <p:tav tm="100000">
-                                          <p:val>
-                                            <p:strVal val="#ppt_x"/>
-                                          </p:val>
-                                        </p:tav>
-                                      </p:tavLst>
-                                    </p:anim>
-                                    <p:anim calcmode="lin" valueType="num">
-                                      <p:cBhvr>
-                                        <p:cTn id="129" dur="450" fill="hold"/>
-                                        <p:tgtEl>
-                                          <p:spTgt spid="28"/>
-                                        </p:tgtEl>
-                                        <p:attrNameLst>
-                                          <p:attrName>ppt_y</p:attrName>
-                                        </p:attrNameLst>
-                                      </p:cBhvr>
-                                      <p:tavLst>
-                                        <p:tav tm="0">
-                                          <p:val>
-                                            <p:strVal val="#ppt_y+.1"/>
-                                          </p:val>
-                                        </p:tav>
-                                        <p:tav tm="100000">
-                                          <p:val>
-                                            <p:strVal val="#ppt_y"/>
-                                          </p:val>
-                                        </p:tav>
-                                      </p:tavLst>
-                                    </p:anim>
-                                  </p:childTnLst>
-                                </p:cTn>
-                              </p:par>
-                              <p:par>
-                                <p:cTn id="130" presetID="42" presetClass="entr" presetSubtype="0" fill="hold" grpId="0" nodeType="withEffect">
-                                  <p:stCondLst>
-                                    <p:cond delay="450"/>
-                                  </p:stCondLst>
-                                  <p:childTnLst>
-                                    <p:set>
-                                      <p:cBhvr>
-                                        <p:cTn id="131" dur="1" fill="hold">
-                                          <p:stCondLst>
-                                            <p:cond delay="0"/>
-                                          </p:stCondLst>
-                                        </p:cTn>
-                                        <p:tgtEl>
-                                          <p:spTgt spid="29"/>
-                                        </p:tgtEl>
-                                        <p:attrNameLst>
-                                          <p:attrName>style.visibility</p:attrName>
-                                        </p:attrNameLst>
-                                      </p:cBhvr>
-                                      <p:to>
-                                        <p:strVal val="visible"/>
-                                      </p:to>
-                                    </p:set>
-                                    <p:animEffect transition="in" filter="fade">
-                                      <p:cBhvr>
-                                        <p:cTn id="132" dur="450"/>
-                                        <p:tgtEl>
-                                          <p:spTgt spid="29"/>
-                                        </p:tgtEl>
-                                      </p:cBhvr>
-                                    </p:animEffect>
-                                    <p:anim calcmode="lin" valueType="num">
-                                      <p:cBhvr>
-                                        <p:cTn id="133" dur="450" fill="hold"/>
-                                        <p:tgtEl>
-                                          <p:spTgt spid="29"/>
-                                        </p:tgtEl>
-                                        <p:attrNameLst>
-                                          <p:attrName>ppt_x</p:attrName>
-                                        </p:attrNameLst>
-                                      </p:cBhvr>
-                                      <p:tavLst>
-                                        <p:tav tm="0">
-                                          <p:val>
-                                            <p:strVal val="#ppt_x"/>
-                                          </p:val>
-                                        </p:tav>
-                                        <p:tav tm="100000">
-                                          <p:val>
-                                            <p:strVal val="#ppt_x"/>
-                                          </p:val>
-                                        </p:tav>
-                                      </p:tavLst>
-                                    </p:anim>
-                                    <p:anim calcmode="lin" valueType="num">
-                                      <p:cBhvr>
-                                        <p:cTn id="134" dur="450" fill="hold"/>
-                                        <p:tgtEl>
-                                          <p:spTgt spid="29"/>
-                                        </p:tgtEl>
-                                        <p:attrNameLst>
-                                          <p:attrName>ppt_y</p:attrName>
-                                        </p:attrNameLst>
-                                      </p:cBhvr>
-                                      <p:tavLst>
-                                        <p:tav tm="0">
-                                          <p:val>
-                                            <p:strVal val="#ppt_y+.1"/>
-                                          </p:val>
-                                        </p:tav>
-                                        <p:tav tm="100000">
-                                          <p:val>
-                                            <p:strVal val="#ppt_y"/>
-                                          </p:val>
-                                        </p:tav>
-                                      </p:tavLst>
-                                    </p:anim>
-                                  </p:childTnLst>
-                                </p:cTn>
-                              </p:par>
-                              <p:par>
-                                <p:cTn id="135" presetID="42" presetClass="entr" presetSubtype="0" fill="hold" grpId="0" nodeType="withEffect">
-                                  <p:stCondLst>
-                                    <p:cond delay="450"/>
-                                  </p:stCondLst>
-                                  <p:childTnLst>
-                                    <p:set>
-                                      <p:cBhvr>
-                                        <p:cTn id="136" dur="1" fill="hold">
-                                          <p:stCondLst>
-                                            <p:cond delay="0"/>
-                                          </p:stCondLst>
-                                        </p:cTn>
-                                        <p:tgtEl>
-                                          <p:spTgt spid="30"/>
-                                        </p:tgtEl>
-                                        <p:attrNameLst>
-                                          <p:attrName>style.visibility</p:attrName>
-                                        </p:attrNameLst>
-                                      </p:cBhvr>
-                                      <p:to>
-                                        <p:strVal val="visible"/>
-                                      </p:to>
-                                    </p:set>
-                                    <p:animEffect transition="in" filter="fade">
-                                      <p:cBhvr>
-                                        <p:cTn id="137" dur="450"/>
-                                        <p:tgtEl>
-                                          <p:spTgt spid="30"/>
-                                        </p:tgtEl>
-                                      </p:cBhvr>
-                                    </p:animEffect>
-                                    <p:anim calcmode="lin" valueType="num">
-                                      <p:cBhvr>
-                                        <p:cTn id="138" dur="450" fill="hold"/>
-                                        <p:tgtEl>
-                                          <p:spTgt spid="30"/>
-                                        </p:tgtEl>
-                                        <p:attrNameLst>
-                                          <p:attrName>ppt_x</p:attrName>
-                                        </p:attrNameLst>
-                                      </p:cBhvr>
-                                      <p:tavLst>
-                                        <p:tav tm="0">
-                                          <p:val>
-                                            <p:strVal val="#ppt_x"/>
-                                          </p:val>
-                                        </p:tav>
-                                        <p:tav tm="100000">
-                                          <p:val>
-                                            <p:strVal val="#ppt_x"/>
-                                          </p:val>
-                                        </p:tav>
-                                      </p:tavLst>
-                                    </p:anim>
-                                    <p:anim calcmode="lin" valueType="num">
-                                      <p:cBhvr>
-                                        <p:cTn id="139" dur="450" fill="hold"/>
-                                        <p:tgtEl>
-                                          <p:spTgt spid="30"/>
                                         </p:tgtEl>
                                         <p:attrNameLst>
                                           <p:attrName>ppt_y</p:attrName>
@@ -14570,24 +13732,20 @@
     <p:bldLst>
       <p:bldP spid="4" grpId="0" animBg="1"/>
       <p:bldP spid="5" grpId="0" animBg="1"/>
-      <p:bldP spid="6" grpId="0" animBg="1"/>
+      <p:bldP spid="7" grpId="0" animBg="1"/>
       <p:bldP spid="8" grpId="0" animBg="1"/>
       <p:bldP spid="9" grpId="0" animBg="1"/>
-      <p:bldP spid="11" grpId="0" animBg="1"/>
+      <p:bldP spid="10" grpId="0" animBg="1"/>
       <p:bldP spid="12" grpId="0" animBg="1"/>
       <p:bldP spid="13" grpId="0" animBg="1"/>
+      <p:bldP spid="14" grpId="0" animBg="1"/>
       <p:bldP spid="15" grpId="0" animBg="1"/>
-      <p:bldP spid="16" grpId="0" animBg="1"/>
+      <p:bldP spid="17" grpId="0" animBg="1"/>
       <p:bldP spid="18" grpId="0" animBg="1"/>
       <p:bldP spid="19" grpId="0" animBg="1"/>
       <p:bldP spid="20" grpId="0" animBg="1"/>
       <p:bldP spid="22" grpId="0" animBg="1"/>
       <p:bldP spid="23" grpId="0" animBg="1"/>
-      <p:bldP spid="25" grpId="0" animBg="1"/>
-      <p:bldP spid="26" grpId="0" animBg="1"/>
-      <p:bldP spid="27" grpId="0" animBg="1"/>
-      <p:bldP spid="29" grpId="0" animBg="1"/>
-      <p:bldP spid="30" grpId="0" animBg="1"/>
     </p:bldLst>
   </p:timing>
 </p:sld>
